--- a/Docs/Progress_Check_Box.pptx
+++ b/Docs/Progress_Check_Box.pptx
@@ -5,7 +5,7 @@
     <p:sldMasterId id="2147483648" r:id="rId1"/>
   </p:sldMasterIdLst>
   <p:notesMasterIdLst>
-    <p:notesMasterId r:id="rId35"/>
+    <p:notesMasterId r:id="rId39"/>
   </p:notesMasterIdLst>
   <p:sldIdLst>
     <p:sldId id="272" r:id="rId2"/>
@@ -19,28 +19,32 @@
     <p:sldId id="275" r:id="rId10"/>
     <p:sldId id="284" r:id="rId11"/>
     <p:sldId id="288" r:id="rId12"/>
-    <p:sldId id="276" r:id="rId13"/>
-    <p:sldId id="261" r:id="rId14"/>
-    <p:sldId id="289" r:id="rId15"/>
-    <p:sldId id="277" r:id="rId16"/>
-    <p:sldId id="267" r:id="rId17"/>
-    <p:sldId id="278" r:id="rId18"/>
-    <p:sldId id="262" r:id="rId19"/>
-    <p:sldId id="269" r:id="rId20"/>
-    <p:sldId id="285" r:id="rId21"/>
-    <p:sldId id="279" r:id="rId22"/>
-    <p:sldId id="263" r:id="rId23"/>
-    <p:sldId id="280" r:id="rId24"/>
-    <p:sldId id="264" r:id="rId25"/>
-    <p:sldId id="281" r:id="rId26"/>
-    <p:sldId id="265" r:id="rId27"/>
-    <p:sldId id="286" r:id="rId28"/>
-    <p:sldId id="282" r:id="rId29"/>
-    <p:sldId id="266" r:id="rId30"/>
-    <p:sldId id="283" r:id="rId31"/>
-    <p:sldId id="271" r:id="rId32"/>
-    <p:sldId id="290" r:id="rId33"/>
-    <p:sldId id="270" r:id="rId34"/>
+    <p:sldId id="291" r:id="rId13"/>
+    <p:sldId id="292" r:id="rId14"/>
+    <p:sldId id="276" r:id="rId15"/>
+    <p:sldId id="261" r:id="rId16"/>
+    <p:sldId id="289" r:id="rId17"/>
+    <p:sldId id="294" r:id="rId18"/>
+    <p:sldId id="277" r:id="rId19"/>
+    <p:sldId id="267" r:id="rId20"/>
+    <p:sldId id="295" r:id="rId21"/>
+    <p:sldId id="278" r:id="rId22"/>
+    <p:sldId id="262" r:id="rId23"/>
+    <p:sldId id="269" r:id="rId24"/>
+    <p:sldId id="285" r:id="rId25"/>
+    <p:sldId id="279" r:id="rId26"/>
+    <p:sldId id="263" r:id="rId27"/>
+    <p:sldId id="280" r:id="rId28"/>
+    <p:sldId id="264" r:id="rId29"/>
+    <p:sldId id="281" r:id="rId30"/>
+    <p:sldId id="265" r:id="rId31"/>
+    <p:sldId id="286" r:id="rId32"/>
+    <p:sldId id="282" r:id="rId33"/>
+    <p:sldId id="266" r:id="rId34"/>
+    <p:sldId id="283" r:id="rId35"/>
+    <p:sldId id="271" r:id="rId36"/>
+    <p:sldId id="290" r:id="rId37"/>
+    <p:sldId id="270" r:id="rId38"/>
   </p:sldIdLst>
   <p:sldSz cx="12192000" cy="6858000"/>
   <p:notesSz cx="6858000" cy="9144000"/>
@@ -229,7 +233,7 @@
           <a:p>
             <a:fld id="{9CD5D8E4-A320-4C82-BF1E-497B145FD5B9}" type="datetimeFigureOut">
               <a:rPr lang="en-US" smtClean="0"/>
-              <a:t>5/25/2026</a:t>
+              <a:t>6/11/2026</a:t>
             </a:fld>
             <a:endParaRPr lang="en-US"/>
           </a:p>
@@ -835,7 +839,7 @@
           <a:p>
             <a:fld id="{B1CD814F-3A2E-4FCD-B679-678770FA1B7D}" type="datetimeFigureOut">
               <a:rPr lang="en-US" smtClean="0"/>
-              <a:t>5/25/2026</a:t>
+              <a:t>6/11/2026</a:t>
             </a:fld>
             <a:endParaRPr lang="en-US"/>
           </a:p>
@@ -1033,7 +1037,7 @@
           <a:p>
             <a:fld id="{B1CD814F-3A2E-4FCD-B679-678770FA1B7D}" type="datetimeFigureOut">
               <a:rPr lang="en-US" smtClean="0"/>
-              <a:t>5/25/2026</a:t>
+              <a:t>6/11/2026</a:t>
             </a:fld>
             <a:endParaRPr lang="en-US"/>
           </a:p>
@@ -1241,7 +1245,7 @@
           <a:p>
             <a:fld id="{B1CD814F-3A2E-4FCD-B679-678770FA1B7D}" type="datetimeFigureOut">
               <a:rPr lang="en-US" smtClean="0"/>
-              <a:t>5/25/2026</a:t>
+              <a:t>6/11/2026</a:t>
             </a:fld>
             <a:endParaRPr lang="en-US"/>
           </a:p>
@@ -1439,7 +1443,7 @@
           <a:p>
             <a:fld id="{B1CD814F-3A2E-4FCD-B679-678770FA1B7D}" type="datetimeFigureOut">
               <a:rPr lang="en-US" smtClean="0"/>
-              <a:t>5/25/2026</a:t>
+              <a:t>6/11/2026</a:t>
             </a:fld>
             <a:endParaRPr lang="en-US"/>
           </a:p>
@@ -1714,7 +1718,7 @@
           <a:p>
             <a:fld id="{B1CD814F-3A2E-4FCD-B679-678770FA1B7D}" type="datetimeFigureOut">
               <a:rPr lang="en-US" smtClean="0"/>
-              <a:t>5/25/2026</a:t>
+              <a:t>6/11/2026</a:t>
             </a:fld>
             <a:endParaRPr lang="en-US"/>
           </a:p>
@@ -1979,7 +1983,7 @@
           <a:p>
             <a:fld id="{B1CD814F-3A2E-4FCD-B679-678770FA1B7D}" type="datetimeFigureOut">
               <a:rPr lang="en-US" smtClean="0"/>
-              <a:t>5/25/2026</a:t>
+              <a:t>6/11/2026</a:t>
             </a:fld>
             <a:endParaRPr lang="en-US"/>
           </a:p>
@@ -2391,7 +2395,7 @@
           <a:p>
             <a:fld id="{B1CD814F-3A2E-4FCD-B679-678770FA1B7D}" type="datetimeFigureOut">
               <a:rPr lang="en-US" smtClean="0"/>
-              <a:t>5/25/2026</a:t>
+              <a:t>6/11/2026</a:t>
             </a:fld>
             <a:endParaRPr lang="en-US"/>
           </a:p>
@@ -2532,7 +2536,7 @@
           <a:p>
             <a:fld id="{B1CD814F-3A2E-4FCD-B679-678770FA1B7D}" type="datetimeFigureOut">
               <a:rPr lang="en-US" smtClean="0"/>
-              <a:t>5/25/2026</a:t>
+              <a:t>6/11/2026</a:t>
             </a:fld>
             <a:endParaRPr lang="en-US"/>
           </a:p>
@@ -2645,7 +2649,7 @@
           <a:p>
             <a:fld id="{B1CD814F-3A2E-4FCD-B679-678770FA1B7D}" type="datetimeFigureOut">
               <a:rPr lang="en-US" smtClean="0"/>
-              <a:t>5/25/2026</a:t>
+              <a:t>6/11/2026</a:t>
             </a:fld>
             <a:endParaRPr lang="en-US"/>
           </a:p>
@@ -2956,7 +2960,7 @@
           <a:p>
             <a:fld id="{B1CD814F-3A2E-4FCD-B679-678770FA1B7D}" type="datetimeFigureOut">
               <a:rPr lang="en-US" smtClean="0"/>
-              <a:t>5/25/2026</a:t>
+              <a:t>6/11/2026</a:t>
             </a:fld>
             <a:endParaRPr lang="en-US"/>
           </a:p>
@@ -3244,7 +3248,7 @@
           <a:p>
             <a:fld id="{B1CD814F-3A2E-4FCD-B679-678770FA1B7D}" type="datetimeFigureOut">
               <a:rPr lang="en-US" smtClean="0"/>
-              <a:t>5/25/2026</a:t>
+              <a:t>6/11/2026</a:t>
             </a:fld>
             <a:endParaRPr lang="en-US"/>
           </a:p>
@@ -3485,7 +3489,7 @@
           <a:p>
             <a:fld id="{B1CD814F-3A2E-4FCD-B679-678770FA1B7D}" type="datetimeFigureOut">
               <a:rPr lang="en-US" smtClean="0"/>
-              <a:t>5/25/2026</a:t>
+              <a:t>6/11/2026</a:t>
             </a:fld>
             <a:endParaRPr lang="en-US"/>
           </a:p>
@@ -4041,7 +4045,7 @@
             </a:r>
             <a:r>
               <a:rPr lang="en-US" sz="1600" b="1" dirty="0"/>
-              <a:t>(19 functions)</a:t>
+              <a:t>(72 functions)</a:t>
             </a:r>
             <a:endParaRPr lang="en-US" sz="1600" dirty="0"/>
           </a:p>
@@ -4126,6 +4130,72 @@
             <a:pPr algn="l"/>
             <a:r>
               <a:rPr lang="en-US" sz="1600" dirty="0" err="1"/>
+              <a:t>select_service_type</a:t>
+            </a:r>
+            <a:r>
+              <a:rPr lang="en-US" sz="1600" dirty="0"/>
+              <a:t> - ✅</a:t>
+            </a:r>
+          </a:p>
+          <a:p>
+            <a:pPr algn="l"/>
+            <a:r>
+              <a:rPr lang="en-US" sz="1600" dirty="0" err="1"/>
+              <a:t>set_all_service_types</a:t>
+            </a:r>
+            <a:r>
+              <a:rPr lang="en-US" sz="1600" dirty="0"/>
+              <a:t> - ✅</a:t>
+            </a:r>
+          </a:p>
+          <a:p>
+            <a:pPr algn="l"/>
+            <a:r>
+              <a:rPr lang="en-US" sz="1600" dirty="0" err="1"/>
+              <a:t>get_all_selected_service_types</a:t>
+            </a:r>
+            <a:r>
+              <a:rPr lang="en-US" sz="1600" dirty="0"/>
+              <a:t> - ✅</a:t>
+            </a:r>
+          </a:p>
+          <a:p>
+            <a:pPr algn="l"/>
+            <a:r>
+              <a:rPr lang="en-US" sz="1600" dirty="0" err="1"/>
+              <a:t>close_service_type_dropdown</a:t>
+            </a:r>
+            <a:r>
+              <a:rPr lang="en-US" sz="1600" dirty="0"/>
+              <a:t> - ✅</a:t>
+            </a:r>
+          </a:p>
+          <a:p>
+            <a:pPr algn="l"/>
+            <a:r>
+              <a:rPr lang="en-US" sz="1600" dirty="0" err="1"/>
+              <a:t>remove_service_type</a:t>
+            </a:r>
+            <a:r>
+              <a:rPr lang="en-US" sz="1600" dirty="0"/>
+              <a:t> - ✅</a:t>
+            </a:r>
+          </a:p>
+          <a:p>
+            <a:pPr algn="l"/>
+            <a:r>
+              <a:rPr lang="en-US" sz="1600" dirty="0" err="1"/>
+              <a:t>remove_all_service_types</a:t>
+            </a:r>
+            <a:r>
+              <a:rPr lang="en-US" sz="1600" dirty="0"/>
+              <a:t> - ✅</a:t>
+            </a:r>
+          </a:p>
+          <a:p>
+            <a:pPr algn="l"/>
+            <a:r>
+              <a:rPr lang="en-US" sz="1600" dirty="0" err="1"/>
               <a:t>select_protection_type</a:t>
             </a:r>
             <a:r>
@@ -4175,62 +4245,6 @@
             <a:r>
               <a:rPr lang="en-US" sz="1600" dirty="0"/>
               <a:t> - ✅</a:t>
-            </a:r>
-          </a:p>
-          <a:p>
-            <a:pPr algn="l"/>
-            <a:r>
-              <a:rPr lang="en-US" sz="1600" dirty="0" err="1"/>
-              <a:t>remove_all_protection_types</a:t>
-            </a:r>
-            <a:r>
-              <a:rPr lang="en-US" sz="1600" dirty="0"/>
-              <a:t> - ✅</a:t>
-            </a:r>
-          </a:p>
-          <a:p>
-            <a:pPr algn="l"/>
-            <a:r>
-              <a:rPr lang="en-US" sz="1600" dirty="0" err="1"/>
-              <a:t>get_filter_by</a:t>
-            </a:r>
-            <a:r>
-              <a:rPr lang="en-US" sz="1600" dirty="0"/>
-              <a:t>  - ✅</a:t>
-            </a:r>
-          </a:p>
-          <a:p>
-            <a:pPr algn="l"/>
-            <a:r>
-              <a:rPr lang="en-US" sz="1600" dirty="0" err="1"/>
-              <a:t>set_filter_by</a:t>
-            </a:r>
-            <a:r>
-              <a:rPr lang="en-US" sz="1600" dirty="0"/>
-              <a:t> - ✅</a:t>
-            </a:r>
-          </a:p>
-          <a:p>
-            <a:pPr algn="l"/>
-            <a:endParaRPr lang="en-US" sz="1600" dirty="0"/>
-          </a:p>
-          <a:p>
-            <a:pPr algn="l"/>
-            <a:endParaRPr lang="en-US" sz="1600" dirty="0"/>
-          </a:p>
-          <a:p>
-            <a:pPr algn="l"/>
-            <a:r>
-              <a:rPr lang="en-US" sz="1600" dirty="0"/>
-              <a:t>More </a:t>
-            </a:r>
-            <a:r>
-              <a:rPr lang="en-US" sz="1600" dirty="0" err="1"/>
-              <a:t>Fuctions</a:t>
-            </a:r>
-            <a:r>
-              <a:rPr lang="en-US" sz="1600" dirty="0"/>
-              <a:t> …..</a:t>
             </a:r>
           </a:p>
           <a:p>
@@ -4326,7 +4340,7 @@
             </a:r>
             <a:r>
               <a:rPr lang="en-US" sz="1600" b="1" dirty="0"/>
-              <a:t>(19 functions)</a:t>
+              <a:t>(72 functions)</a:t>
             </a:r>
             <a:endParaRPr lang="en-US" sz="1600" dirty="0"/>
           </a:p>
@@ -4334,6 +4348,39 @@
             <a:pPr algn="l"/>
             <a:r>
               <a:rPr lang="en-US" sz="1600" dirty="0" err="1"/>
+              <a:t>remove_all_protection_types</a:t>
+            </a:r>
+            <a:r>
+              <a:rPr lang="en-US" sz="1600" dirty="0"/>
+              <a:t> - ✅</a:t>
+            </a:r>
+          </a:p>
+          <a:p>
+            <a:pPr algn="l"/>
+            <a:r>
+              <a:rPr lang="en-US" sz="1600" dirty="0" err="1"/>
+              <a:t>get_filter_by</a:t>
+            </a:r>
+            <a:r>
+              <a:rPr lang="en-US" sz="1600" dirty="0"/>
+              <a:t>  - ✅</a:t>
+            </a:r>
+          </a:p>
+          <a:p>
+            <a:pPr algn="l"/>
+            <a:r>
+              <a:rPr lang="en-US" sz="1600" dirty="0" err="1"/>
+              <a:t>set_filter_by</a:t>
+            </a:r>
+            <a:r>
+              <a:rPr lang="en-US" sz="1600" dirty="0"/>
+              <a:t> - ✅</a:t>
+            </a:r>
+          </a:p>
+          <a:p>
+            <a:pPr algn="l"/>
+            <a:r>
+              <a:rPr lang="en-US" sz="1600" dirty="0" err="1"/>
               <a:t>get_selected_domain_or_chassis</a:t>
             </a:r>
             <a:r>
@@ -4360,6 +4407,338 @@
             </a:r>
             <a:r>
               <a:rPr lang="en-US" sz="1600" dirty="0"/>
+              <a:t> - ✅</a:t>
+            </a:r>
+          </a:p>
+          <a:p>
+            <a:pPr algn="l"/>
+            <a:r>
+              <a:rPr lang="en-US" sz="1600" dirty="0" err="1"/>
+              <a:t>click_next</a:t>
+            </a:r>
+            <a:r>
+              <a:rPr lang="en-US" sz="1600" dirty="0"/>
+              <a:t> - ✅</a:t>
+            </a:r>
+          </a:p>
+          <a:p>
+            <a:pPr algn="l"/>
+            <a:r>
+              <a:rPr lang="en-US" sz="1600" dirty="0" err="1"/>
+              <a:t>click_on_service</a:t>
+            </a:r>
+            <a:r>
+              <a:rPr lang="en-US" sz="1600" dirty="0"/>
+              <a:t> - ✅</a:t>
+            </a:r>
+          </a:p>
+          <a:p>
+            <a:pPr algn="l"/>
+            <a:r>
+              <a:rPr lang="en-US" sz="1600" dirty="0" err="1"/>
+              <a:t>get_service_list</a:t>
+            </a:r>
+            <a:r>
+              <a:rPr lang="en-US" sz="1600" dirty="0"/>
+              <a:t> - ✅</a:t>
+            </a:r>
+          </a:p>
+          <a:p>
+            <a:pPr algn="l"/>
+            <a:r>
+              <a:rPr lang="en-US" sz="1600" dirty="0" err="1"/>
+              <a:t>click_on_events_alarms_button</a:t>
+            </a:r>
+            <a:r>
+              <a:rPr lang="en-US" sz="1600" dirty="0"/>
+              <a:t> - ✅</a:t>
+            </a:r>
+          </a:p>
+          <a:p>
+            <a:pPr algn="l"/>
+            <a:r>
+              <a:rPr lang="en-US" sz="1600" dirty="0" err="1"/>
+              <a:t>set_faults_type</a:t>
+            </a:r>
+            <a:r>
+              <a:rPr lang="en-US" sz="1600" dirty="0"/>
+              <a:t> - ✅</a:t>
+            </a:r>
+          </a:p>
+          <a:p>
+            <a:pPr algn="l"/>
+            <a:r>
+              <a:rPr lang="en-US" sz="1600" dirty="0" err="1"/>
+              <a:t>get_faults_type</a:t>
+            </a:r>
+            <a:r>
+              <a:rPr lang="en-US" sz="1600" dirty="0"/>
+              <a:t> - ✅</a:t>
+            </a:r>
+          </a:p>
+          <a:p>
+            <a:pPr algn="l"/>
+            <a:r>
+              <a:rPr lang="en-US" sz="1600" dirty="0" err="1"/>
+              <a:t>set_severity</a:t>
+            </a:r>
+            <a:r>
+              <a:rPr lang="en-US" sz="1600" dirty="0"/>
+              <a:t> - ✅</a:t>
+            </a:r>
+          </a:p>
+          <a:p>
+            <a:pPr algn="l"/>
+            <a:r>
+              <a:rPr lang="en-US" sz="1600" dirty="0" err="1"/>
+              <a:t>get_severity</a:t>
+            </a:r>
+            <a:r>
+              <a:rPr lang="en-US" sz="1600" dirty="0"/>
+              <a:t> - ✅</a:t>
+            </a:r>
+          </a:p>
+          <a:p>
+            <a:pPr algn="l"/>
+            <a:r>
+              <a:rPr lang="en-US" sz="1600" dirty="0" err="1"/>
+              <a:t>set_from_date</a:t>
+            </a:r>
+            <a:r>
+              <a:rPr lang="en-US" sz="1600" dirty="0"/>
+              <a:t> - ✅</a:t>
+            </a:r>
+          </a:p>
+          <a:p>
+            <a:pPr algn="l"/>
+            <a:r>
+              <a:rPr lang="en-US" sz="1600" dirty="0" err="1"/>
+              <a:t>get_from_date</a:t>
+            </a:r>
+            <a:r>
+              <a:rPr lang="en-US" sz="1600" dirty="0"/>
+              <a:t> - ✅</a:t>
+            </a:r>
+          </a:p>
+          <a:p>
+            <a:pPr algn="l"/>
+            <a:r>
+              <a:rPr lang="en-US" sz="1600" dirty="0" err="1"/>
+              <a:t>set_to_date</a:t>
+            </a:r>
+            <a:r>
+              <a:rPr lang="en-US" sz="1600" dirty="0"/>
+              <a:t> - ✅</a:t>
+            </a:r>
+          </a:p>
+          <a:p>
+            <a:pPr algn="l"/>
+            <a:r>
+              <a:rPr lang="en-US" sz="1600" dirty="0" err="1"/>
+              <a:t>get_to_date</a:t>
+            </a:r>
+            <a:r>
+              <a:rPr lang="en-US" sz="1600" dirty="0"/>
+              <a:t> - ✅</a:t>
+            </a:r>
+          </a:p>
+          <a:p>
+            <a:pPr algn="l"/>
+            <a:endParaRPr lang="en-US" sz="1600" dirty="0"/>
+          </a:p>
+          <a:p>
+            <a:pPr algn="l"/>
+            <a:endParaRPr lang="en-US" sz="1600" dirty="0"/>
+          </a:p>
+          <a:p>
+            <a:pPr algn="l"/>
+            <a:endParaRPr lang="en-US" sz="1600" dirty="0"/>
+          </a:p>
+          <a:p>
+            <a:pPr algn="l"/>
+            <a:endParaRPr lang="en-US" sz="1600" dirty="0"/>
+          </a:p>
+          <a:p>
+            <a:pPr algn="l"/>
+            <a:endParaRPr lang="en-US" sz="1600" dirty="0"/>
+          </a:p>
+        </p:txBody>
+      </p:sp>
+    </p:spTree>
+    <p:extLst>
+      <p:ext uri="{BB962C8B-B14F-4D97-AF65-F5344CB8AC3E}">
+        <p14:creationId xmlns:p14="http://schemas.microsoft.com/office/powerpoint/2010/main" val="398093597"/>
+      </p:ext>
+    </p:extLst>
+  </p:cSld>
+  <p:clrMapOvr>
+    <a:masterClrMapping/>
+  </p:clrMapOvr>
+</p:sld>
+</file>
+
+<file path=ppt/slides/slide12.xml><?xml version="1.0" encoding="utf-8"?>
+<p:sld xmlns:a="http://schemas.openxmlformats.org/drawingml/2006/main" xmlns:r="http://schemas.openxmlformats.org/officeDocument/2006/relationships" xmlns:p="http://schemas.openxmlformats.org/presentationml/2006/main">
+  <p:cSld>
+    <p:spTree>
+      <p:nvGrpSpPr>
+        <p:cNvPr id="1" name="">
+          <a:extLst>
+            <a:ext uri="{FF2B5EF4-FFF2-40B4-BE49-F238E27FC236}">
+              <a16:creationId xmlns:a16="http://schemas.microsoft.com/office/drawing/2014/main" id="{133CDFE8-FA2F-2C7F-8B9F-6200675DA2FC}"/>
+            </a:ext>
+          </a:extLst>
+        </p:cNvPr>
+        <p:cNvGrpSpPr/>
+        <p:nvPr/>
+      </p:nvGrpSpPr>
+      <p:grpSpPr>
+        <a:xfrm>
+          <a:off x="0" y="0"/>
+          <a:ext cx="0" cy="0"/>
+          <a:chOff x="0" y="0"/>
+          <a:chExt cx="0" cy="0"/>
+        </a:xfrm>
+      </p:grpSpPr>
+      <p:sp>
+        <p:nvSpPr>
+          <p:cNvPr id="3" name="Subtitle 2">
+            <a:extLst>
+              <a:ext uri="{FF2B5EF4-FFF2-40B4-BE49-F238E27FC236}">
+                <a16:creationId xmlns:a16="http://schemas.microsoft.com/office/drawing/2014/main" id="{D553E8C6-FCC9-1525-C194-0F202E951A5E}"/>
+              </a:ext>
+            </a:extLst>
+          </p:cNvPr>
+          <p:cNvSpPr>
+            <a:spLocks noGrp="1"/>
+          </p:cNvSpPr>
+          <p:nvPr>
+            <p:ph type="subTitle" idx="1"/>
+          </p:nvPr>
+        </p:nvSpPr>
+        <p:spPr>
+          <a:xfrm>
+            <a:off x="106680" y="99886"/>
+            <a:ext cx="11990832" cy="6666674"/>
+          </a:xfrm>
+        </p:spPr>
+        <p:txBody>
+          <a:bodyPr>
+            <a:normAutofit/>
+          </a:bodyPr>
+          <a:lstStyle/>
+          <a:p>
+            <a:pPr algn="l"/>
+            <a:r>
+              <a:rPr lang="en-US" sz="1800" b="1" dirty="0" err="1"/>
+              <a:t>service_list</a:t>
+            </a:r>
+            <a:r>
+              <a:rPr lang="en-US" sz="1800" b="1" dirty="0"/>
+              <a:t>: </a:t>
+            </a:r>
+            <a:r>
+              <a:rPr lang="en-US" sz="1600" b="1" dirty="0"/>
+              <a:t>(72 functions)</a:t>
+            </a:r>
+            <a:endParaRPr lang="en-US" sz="1600" dirty="0"/>
+          </a:p>
+          <a:p>
+            <a:pPr algn="l"/>
+            <a:r>
+              <a:rPr lang="en-US" sz="1600" dirty="0" err="1"/>
+              <a:t>set_message</a:t>
+            </a:r>
+            <a:r>
+              <a:rPr lang="en-US" sz="1600" dirty="0"/>
+              <a:t> - ✅</a:t>
+            </a:r>
+          </a:p>
+          <a:p>
+            <a:pPr algn="l"/>
+            <a:r>
+              <a:rPr lang="en-US" sz="1600" dirty="0" err="1"/>
+              <a:t>message_check_exact_match_only</a:t>
+            </a:r>
+            <a:r>
+              <a:rPr lang="en-US" sz="1600" dirty="0"/>
+              <a:t> - ✅</a:t>
+            </a:r>
+          </a:p>
+          <a:p>
+            <a:pPr algn="l"/>
+            <a:r>
+              <a:rPr lang="en-US" sz="1600" dirty="0" err="1"/>
+              <a:t>message_uncheck_exact_match_only</a:t>
+            </a:r>
+            <a:r>
+              <a:rPr lang="en-US" sz="1600" dirty="0"/>
+              <a:t> - ✅</a:t>
+            </a:r>
+          </a:p>
+          <a:p>
+            <a:pPr algn="l"/>
+            <a:r>
+              <a:rPr lang="en-US" sz="1600" dirty="0" err="1"/>
+              <a:t>hide_event</a:t>
+            </a:r>
+            <a:r>
+              <a:rPr lang="en-US" sz="1600" dirty="0"/>
+              <a:t> - ✅</a:t>
+            </a:r>
+          </a:p>
+          <a:p>
+            <a:pPr algn="l"/>
+            <a:r>
+              <a:rPr lang="en-US" sz="1600" dirty="0" err="1"/>
+              <a:t>show_hidden_events</a:t>
+            </a:r>
+            <a:r>
+              <a:rPr lang="en-US" sz="1600" dirty="0"/>
+              <a:t> - ✅</a:t>
+            </a:r>
+          </a:p>
+          <a:p>
+            <a:pPr algn="l"/>
+            <a:r>
+              <a:rPr lang="en-US" sz="1600" dirty="0" err="1"/>
+              <a:t>acknowledge_alarm</a:t>
+            </a:r>
+            <a:r>
+              <a:rPr lang="en-US" sz="1600" dirty="0"/>
+              <a:t> - ✅</a:t>
+            </a:r>
+          </a:p>
+          <a:p>
+            <a:pPr algn="l"/>
+            <a:r>
+              <a:rPr lang="en-US" sz="1600" dirty="0" err="1"/>
+              <a:t>click_on_performance_button</a:t>
+            </a:r>
+            <a:r>
+              <a:rPr lang="en-US" sz="1600" dirty="0"/>
+              <a:t> - ✅</a:t>
+            </a:r>
+          </a:p>
+          <a:p>
+            <a:pPr algn="l"/>
+            <a:r>
+              <a:rPr lang="en-US" sz="1600" dirty="0" err="1"/>
+              <a:t>performance_set_display</a:t>
+            </a:r>
+            <a:r>
+              <a:rPr lang="en-US" sz="1600" dirty="0"/>
+              <a:t> - </a:t>
+            </a:r>
+          </a:p>
+          <a:p>
+            <a:pPr algn="l"/>
+            <a:r>
+              <a:rPr lang="en-US" sz="1600" dirty="0" err="1"/>
+              <a:t>performance_get_display</a:t>
+            </a:r>
+            <a:r>
+              <a:rPr lang="en-US" sz="1600" dirty="0"/>
               <a:t> -</a:t>
             </a:r>
           </a:p>
@@ -4367,11 +4746,99 @@
             <a:pPr algn="l"/>
             <a:r>
               <a:rPr lang="en-US" sz="1600" dirty="0" err="1"/>
-              <a:t>click_next</a:t>
-            </a:r>
-            <a:r>
-              <a:rPr lang="en-US" sz="1600" dirty="0"/>
-              <a:t> - </a:t>
+              <a:t>performance_set_period_start</a:t>
+            </a:r>
+            <a:r>
+              <a:rPr lang="en-US" sz="1600" dirty="0"/>
+              <a:t> - ✅</a:t>
+            </a:r>
+          </a:p>
+          <a:p>
+            <a:pPr algn="l"/>
+            <a:r>
+              <a:rPr lang="en-US" sz="1600" dirty="0" err="1"/>
+              <a:t>performance_get_period_start</a:t>
+            </a:r>
+            <a:r>
+              <a:rPr lang="en-US" sz="1600" dirty="0"/>
+              <a:t> - ✅</a:t>
+            </a:r>
+          </a:p>
+          <a:p>
+            <a:pPr algn="l"/>
+            <a:r>
+              <a:rPr lang="en-US" sz="1600" dirty="0" err="1"/>
+              <a:t>performance_set_period_end</a:t>
+            </a:r>
+            <a:r>
+              <a:rPr lang="en-US" sz="1600" dirty="0"/>
+              <a:t> - ✅</a:t>
+            </a:r>
+          </a:p>
+          <a:p>
+            <a:pPr algn="l"/>
+            <a:r>
+              <a:rPr lang="en-US" sz="1600" dirty="0" err="1"/>
+              <a:t>performance_get_period_end</a:t>
+            </a:r>
+            <a:r>
+              <a:rPr lang="en-US" sz="1600" dirty="0"/>
+              <a:t> - ✅</a:t>
+            </a:r>
+          </a:p>
+          <a:p>
+            <a:pPr algn="l"/>
+            <a:r>
+              <a:rPr lang="en-US" sz="1600" dirty="0" err="1"/>
+              <a:t>performance_set_device_A</a:t>
+            </a:r>
+            <a:r>
+              <a:rPr lang="en-US" sz="1600" dirty="0"/>
+              <a:t> - ✅</a:t>
+            </a:r>
+          </a:p>
+          <a:p>
+            <a:pPr algn="l"/>
+            <a:r>
+              <a:rPr lang="en-US" sz="1600" dirty="0" err="1"/>
+              <a:t>performance_set_device_Z</a:t>
+            </a:r>
+            <a:r>
+              <a:rPr lang="en-US" sz="1600" dirty="0"/>
+              <a:t> - ✅</a:t>
+            </a:r>
+          </a:p>
+          <a:p>
+            <a:pPr algn="l"/>
+            <a:r>
+              <a:rPr lang="en-US" sz="1600" dirty="0" err="1"/>
+              <a:t>performance_get_device_A</a:t>
+            </a:r>
+            <a:r>
+              <a:rPr lang="en-US" sz="1600" dirty="0"/>
+              <a:t> - ✅</a:t>
+            </a:r>
+          </a:p>
+          <a:p>
+            <a:pPr algn="l"/>
+            <a:r>
+              <a:rPr lang="en-US" sz="1600" dirty="0" err="1"/>
+              <a:t>performance_get_device_Z</a:t>
+            </a:r>
+            <a:r>
+              <a:rPr lang="en-US" sz="1600" dirty="0"/>
+              <a:t> - ✅</a:t>
+            </a:r>
+          </a:p>
+          <a:p>
+            <a:pPr algn="l"/>
+            <a:r>
+              <a:rPr lang="en-US" sz="1600" dirty="0" err="1"/>
+              <a:t>performance_set_port_A</a:t>
+            </a:r>
+            <a:r>
+              <a:rPr lang="en-US" sz="1600" dirty="0"/>
+              <a:t> - ✅</a:t>
             </a:r>
           </a:p>
           <a:p>
@@ -4384,30 +4851,286 @@
           </a:p>
           <a:p>
             <a:pPr algn="l"/>
-            <a:r>
-              <a:rPr lang="en-US" sz="1600" dirty="0"/>
-              <a:t>More </a:t>
-            </a:r>
-            <a:r>
-              <a:rPr lang="en-US" sz="1600" dirty="0" err="1"/>
-              <a:t>Fuctions</a:t>
-            </a:r>
-            <a:r>
-              <a:rPr lang="en-US" sz="1600" dirty="0"/>
-              <a:t> …..</a:t>
-            </a:r>
-          </a:p>
-          <a:p>
-            <a:pPr algn="l"/>
             <a:endParaRPr lang="en-US" sz="1600" dirty="0"/>
           </a:p>
-          <a:p>
-            <a:pPr algn="l"/>
+        </p:txBody>
+      </p:sp>
+    </p:spTree>
+    <p:extLst>
+      <p:ext uri="{BB962C8B-B14F-4D97-AF65-F5344CB8AC3E}">
+        <p14:creationId xmlns:p14="http://schemas.microsoft.com/office/powerpoint/2010/main" val="950277672"/>
+      </p:ext>
+    </p:extLst>
+  </p:cSld>
+  <p:clrMapOvr>
+    <a:masterClrMapping/>
+  </p:clrMapOvr>
+</p:sld>
+</file>
+
+<file path=ppt/slides/slide13.xml><?xml version="1.0" encoding="utf-8"?>
+<p:sld xmlns:a="http://schemas.openxmlformats.org/drawingml/2006/main" xmlns:r="http://schemas.openxmlformats.org/officeDocument/2006/relationships" xmlns:p="http://schemas.openxmlformats.org/presentationml/2006/main">
+  <p:cSld>
+    <p:spTree>
+      <p:nvGrpSpPr>
+        <p:cNvPr id="1" name="">
+          <a:extLst>
+            <a:ext uri="{FF2B5EF4-FFF2-40B4-BE49-F238E27FC236}">
+              <a16:creationId xmlns:a16="http://schemas.microsoft.com/office/drawing/2014/main" id="{07954E9C-5C79-2AB2-C2C4-968E9E174E8A}"/>
+            </a:ext>
+          </a:extLst>
+        </p:cNvPr>
+        <p:cNvGrpSpPr/>
+        <p:nvPr/>
+      </p:nvGrpSpPr>
+      <p:grpSpPr>
+        <a:xfrm>
+          <a:off x="0" y="0"/>
+          <a:ext cx="0" cy="0"/>
+          <a:chOff x="0" y="0"/>
+          <a:chExt cx="0" cy="0"/>
+        </a:xfrm>
+      </p:grpSpPr>
+      <p:sp>
+        <p:nvSpPr>
+          <p:cNvPr id="3" name="Subtitle 2">
+            <a:extLst>
+              <a:ext uri="{FF2B5EF4-FFF2-40B4-BE49-F238E27FC236}">
+                <a16:creationId xmlns:a16="http://schemas.microsoft.com/office/drawing/2014/main" id="{3FA33419-ED3D-37A4-9C1D-C57F35B55089}"/>
+              </a:ext>
+            </a:extLst>
+          </p:cNvPr>
+          <p:cNvSpPr>
+            <a:spLocks noGrp="1"/>
+          </p:cNvSpPr>
+          <p:nvPr>
+            <p:ph type="subTitle" idx="1"/>
+          </p:nvPr>
+        </p:nvSpPr>
+        <p:spPr>
+          <a:xfrm>
+            <a:off x="106680" y="99886"/>
+            <a:ext cx="11990832" cy="6666674"/>
+          </a:xfrm>
+        </p:spPr>
+        <p:txBody>
+          <a:bodyPr>
+            <a:normAutofit/>
+          </a:bodyPr>
+          <a:lstStyle/>
+          <a:p>
+            <a:pPr algn="l"/>
+            <a:r>
+              <a:rPr lang="en-US" sz="1800" b="1" dirty="0" err="1"/>
+              <a:t>service_list</a:t>
+            </a:r>
+            <a:r>
+              <a:rPr lang="en-US" sz="1800" b="1" dirty="0"/>
+              <a:t>: </a:t>
+            </a:r>
+            <a:r>
+              <a:rPr lang="en-US" sz="1600" b="1" dirty="0"/>
+              <a:t>(72 functions)</a:t>
+            </a:r>
             <a:endParaRPr lang="en-US" sz="1600" dirty="0"/>
           </a:p>
           <a:p>
             <a:pPr algn="l"/>
-            <a:endParaRPr lang="en-US" sz="1600" dirty="0"/>
+            <a:r>
+              <a:rPr lang="en-US" sz="1600" dirty="0" err="1"/>
+              <a:t>performance_set_port_Z</a:t>
+            </a:r>
+            <a:r>
+              <a:rPr lang="en-US" sz="1600" dirty="0"/>
+              <a:t> - ✅</a:t>
+            </a:r>
+          </a:p>
+          <a:p>
+            <a:pPr algn="l"/>
+            <a:r>
+              <a:rPr lang="en-US" sz="1600" dirty="0" err="1"/>
+              <a:t>performance_get_port_A</a:t>
+            </a:r>
+            <a:r>
+              <a:rPr lang="en-US" sz="1600" dirty="0"/>
+              <a:t> - ✅</a:t>
+            </a:r>
+          </a:p>
+          <a:p>
+            <a:pPr algn="l"/>
+            <a:r>
+              <a:rPr lang="en-US" sz="1600" dirty="0" err="1"/>
+              <a:t>performance_get_port_Z</a:t>
+            </a:r>
+            <a:r>
+              <a:rPr lang="en-US" sz="1600" dirty="0"/>
+              <a:t> - ✅</a:t>
+            </a:r>
+          </a:p>
+          <a:p>
+            <a:pPr algn="l"/>
+            <a:r>
+              <a:rPr lang="en-US" sz="1600" dirty="0" err="1"/>
+              <a:t>performance_set_pm_period_type</a:t>
+            </a:r>
+            <a:r>
+              <a:rPr lang="en-US" sz="1600" dirty="0"/>
+              <a:t> - ✅</a:t>
+            </a:r>
+          </a:p>
+          <a:p>
+            <a:pPr algn="l"/>
+            <a:r>
+              <a:rPr lang="en-US" sz="1600" dirty="0" err="1"/>
+              <a:t>performance_get_pm_period_type</a:t>
+            </a:r>
+            <a:r>
+              <a:rPr lang="en-US" sz="1600" dirty="0"/>
+              <a:t> - ✅</a:t>
+            </a:r>
+          </a:p>
+          <a:p>
+            <a:pPr algn="l"/>
+            <a:r>
+              <a:rPr lang="en-US" sz="1600" dirty="0" err="1"/>
+              <a:t>performance_set_pm_type</a:t>
+            </a:r>
+            <a:r>
+              <a:rPr lang="en-US" sz="1600" dirty="0"/>
+              <a:t> - ✅</a:t>
+            </a:r>
+          </a:p>
+          <a:p>
+            <a:pPr algn="l"/>
+            <a:r>
+              <a:rPr lang="en-US" sz="1600" dirty="0" err="1"/>
+              <a:t>performance_get_pm_type</a:t>
+            </a:r>
+            <a:r>
+              <a:rPr lang="en-US" sz="1600" dirty="0"/>
+              <a:t> - ✅</a:t>
+            </a:r>
+          </a:p>
+          <a:p>
+            <a:pPr algn="l"/>
+            <a:r>
+              <a:rPr lang="en-US" sz="1600" dirty="0" err="1"/>
+              <a:t>performance_get_pm_table</a:t>
+            </a:r>
+            <a:r>
+              <a:rPr lang="en-US" sz="1600" dirty="0"/>
+              <a:t> - ✅</a:t>
+            </a:r>
+          </a:p>
+          <a:p>
+            <a:pPr algn="l"/>
+            <a:r>
+              <a:rPr lang="en-US" sz="1600" dirty="0" err="1"/>
+              <a:t>performance_refresh_pm_table</a:t>
+            </a:r>
+            <a:r>
+              <a:rPr lang="en-US" sz="1600" dirty="0"/>
+              <a:t> - ✅</a:t>
+            </a:r>
+          </a:p>
+          <a:p>
+            <a:pPr algn="l"/>
+            <a:r>
+              <a:rPr lang="en-US" sz="1600" dirty="0" err="1"/>
+              <a:t>click_on_path</a:t>
+            </a:r>
+            <a:r>
+              <a:rPr lang="en-US" sz="1600" dirty="0"/>
+              <a:t> - ✅</a:t>
+            </a:r>
+          </a:p>
+          <a:p>
+            <a:pPr algn="l"/>
+            <a:r>
+              <a:rPr lang="en-US" sz="1600" dirty="0" err="1"/>
+              <a:t>close_ROADM_service_path_table</a:t>
+            </a:r>
+            <a:r>
+              <a:rPr lang="en-US" sz="1600" dirty="0"/>
+              <a:t> - ✅</a:t>
+            </a:r>
+          </a:p>
+          <a:p>
+            <a:pPr algn="l"/>
+            <a:r>
+              <a:rPr lang="en-US" sz="1600" dirty="0" err="1"/>
+              <a:t>get_ROADM_service_path_table</a:t>
+            </a:r>
+            <a:r>
+              <a:rPr lang="en-US" sz="1600" dirty="0"/>
+              <a:t> - ✅</a:t>
+            </a:r>
+          </a:p>
+          <a:p>
+            <a:pPr algn="l"/>
+            <a:r>
+              <a:rPr lang="en-US" sz="1600" dirty="0" err="1"/>
+              <a:t>rename_service</a:t>
+            </a:r>
+            <a:r>
+              <a:rPr lang="en-US" sz="1600" dirty="0"/>
+              <a:t> - ✅</a:t>
+            </a:r>
+          </a:p>
+          <a:p>
+            <a:pPr algn="l"/>
+            <a:r>
+              <a:rPr lang="en-US" sz="1600" dirty="0" err="1"/>
+              <a:t>rename_service_cancel_button</a:t>
+            </a:r>
+            <a:r>
+              <a:rPr lang="en-US" sz="1600" dirty="0"/>
+              <a:t> - ✅</a:t>
+            </a:r>
+          </a:p>
+          <a:p>
+            <a:pPr algn="l"/>
+            <a:r>
+              <a:rPr lang="en-US" sz="1600" dirty="0" err="1"/>
+              <a:t>remove_service</a:t>
+            </a:r>
+            <a:r>
+              <a:rPr lang="en-US" sz="1600" dirty="0"/>
+              <a:t> - ✅</a:t>
+            </a:r>
+          </a:p>
+          <a:p>
+            <a:pPr algn="l"/>
+            <a:r>
+              <a:rPr lang="en-US" sz="1600" dirty="0" err="1"/>
+              <a:t>remove_service_cancel_button</a:t>
+            </a:r>
+            <a:r>
+              <a:rPr lang="en-US" sz="1600" dirty="0"/>
+              <a:t> - ✅</a:t>
+            </a:r>
+          </a:p>
+          <a:p>
+            <a:pPr algn="l"/>
+            <a:r>
+              <a:rPr lang="en-US" sz="1600" dirty="0" err="1"/>
+              <a:t>export_CSV</a:t>
+            </a:r>
+            <a:r>
+              <a:rPr lang="en-US" sz="1600" dirty="0"/>
+              <a:t> - ✅</a:t>
+            </a:r>
+          </a:p>
+          <a:p>
+            <a:pPr algn="l"/>
+            <a:r>
+              <a:rPr lang="en-US" sz="1600" dirty="0" err="1"/>
+              <a:t>verify_CSV_valid</a:t>
+            </a:r>
+            <a:r>
+              <a:rPr lang="en-US" sz="1600" dirty="0"/>
+              <a:t> -</a:t>
+            </a:r>
           </a:p>
           <a:p>
             <a:pPr algn="l"/>
@@ -4420,7 +5143,7 @@
           <p:cNvPr id="4" name="TextBox 3">
             <a:extLst>
               <a:ext uri="{FF2B5EF4-FFF2-40B4-BE49-F238E27FC236}">
-                <a16:creationId xmlns:a16="http://schemas.microsoft.com/office/drawing/2014/main" id="{1EB9FCDF-7262-E92F-9160-2C4C375A4606}"/>
+                <a16:creationId xmlns:a16="http://schemas.microsoft.com/office/drawing/2014/main" id="{516AFDDA-2EAD-8E3B-DB82-33E79DA8E6E6}"/>
               </a:ext>
             </a:extLst>
           </p:cNvPr>
@@ -4449,7 +5172,7 @@
                   <a:srgbClr val="FFFF00"/>
                 </a:highlight>
               </a:rPr>
-              <a:t>Summary: 89%</a:t>
+              <a:t>Summary: 95%</a:t>
             </a:r>
             <a:endParaRPr lang="en-US" sz="1200" b="1" dirty="0">
               <a:highlight>
@@ -4462,7 +5185,7 @@
     </p:spTree>
     <p:extLst>
       <p:ext uri="{BB962C8B-B14F-4D97-AF65-F5344CB8AC3E}">
-        <p14:creationId xmlns:p14="http://schemas.microsoft.com/office/powerpoint/2010/main" val="398093597"/>
+        <p14:creationId xmlns:p14="http://schemas.microsoft.com/office/powerpoint/2010/main" val="3004552666"/>
       </p:ext>
     </p:extLst>
   </p:cSld>
@@ -4472,7 +5195,7 @@
 </p:sld>
 </file>
 
-<file path=ppt/slides/slide12.xml><?xml version="1.0" encoding="utf-8"?>
+<file path=ppt/slides/slide14.xml><?xml version="1.0" encoding="utf-8"?>
 <p:sld xmlns:a="http://schemas.openxmlformats.org/drawingml/2006/main" xmlns:r="http://schemas.openxmlformats.org/officeDocument/2006/relationships" xmlns:p="http://schemas.openxmlformats.org/presentationml/2006/main">
   <p:cSld>
     <p:spTree>
@@ -4566,7 +5289,7 @@
 </p:sld>
 </file>
 
-<file path=ppt/slides/slide13.xml><?xml version="1.0" encoding="utf-8"?>
+<file path=ppt/slides/slide15.xml><?xml version="1.0" encoding="utf-8"?>
 <p:sld xmlns:a="http://schemas.openxmlformats.org/drawingml/2006/main" xmlns:r="http://schemas.openxmlformats.org/officeDocument/2006/relationships" xmlns:p="http://schemas.openxmlformats.org/presentationml/2006/main">
   <p:cSld>
     <p:spTree>
@@ -4624,7 +5347,18 @@
             </a:r>
             <a:r>
               <a:rPr lang="en-US" sz="1800" b="1" dirty="0"/>
-              <a:t>: (28 functions)</a:t>
+              <a:t>: (42 functions)</a:t>
+            </a:r>
+          </a:p>
+          <a:p>
+            <a:pPr algn="l"/>
+            <a:r>
+              <a:rPr lang="en-US" sz="1600" dirty="0" err="1"/>
+              <a:t>create_service</a:t>
+            </a:r>
+            <a:r>
+              <a:rPr lang="en-US" sz="1600" dirty="0"/>
+              <a:t> - ✅</a:t>
             </a:r>
           </a:p>
           <a:p>
@@ -4635,7 +5369,7 @@
             </a:r>
             <a:r>
               <a:rPr lang="en-US" sz="1600" dirty="0"/>
-              <a:t> – ✅</a:t>
+              <a:t> - ✅</a:t>
             </a:r>
           </a:p>
           <a:p>
@@ -4646,7 +5380,7 @@
             </a:r>
             <a:r>
               <a:rPr lang="en-US" sz="1600" dirty="0"/>
-              <a:t> – ✅</a:t>
+              <a:t> - ✅</a:t>
             </a:r>
           </a:p>
           <a:p>
@@ -4657,7 +5391,7 @@
             </a:r>
             <a:r>
               <a:rPr lang="en-US" sz="1600" dirty="0"/>
-              <a:t> – ✅</a:t>
+              <a:t> - ✅</a:t>
             </a:r>
           </a:p>
           <a:p>
@@ -4796,30 +5530,15 @@
             <a:pPr algn="l"/>
             <a:r>
               <a:rPr lang="en-US" sz="1600" dirty="0"/>
-              <a:t>set_ROADM_path1_A_device -</a:t>
-            </a:r>
-          </a:p>
-          <a:p>
-            <a:pPr algn="l"/>
-            <a:r>
-              <a:rPr lang="en-US" sz="1600" dirty="0"/>
-              <a:t>set_ROADM_path1_A_port -</a:t>
-            </a:r>
-          </a:p>
-          <a:p>
-            <a:pPr algn="l"/>
-            <a:r>
-              <a:rPr lang="en-US" sz="1600" dirty="0"/>
-              <a:t>set_ROADM_path1_Z_device -</a:t>
-            </a:r>
-          </a:p>
-          <a:p>
-            <a:pPr algn="l"/>
-            <a:endParaRPr lang="en-US" sz="1600" dirty="0"/>
-          </a:p>
-          <a:p>
-            <a:pPr algn="l"/>
-            <a:endParaRPr lang="en-US" sz="1600" dirty="0"/>
+              <a:t>set_ROADM_path1_A_device - ✅</a:t>
+            </a:r>
+          </a:p>
+          <a:p>
+            <a:pPr algn="l"/>
+            <a:r>
+              <a:rPr lang="en-US" sz="1600" dirty="0"/>
+              <a:t>set_ROADM_path1_A_port - ✅</a:t>
+            </a:r>
           </a:p>
           <a:p>
             <a:pPr algn="l"/>
@@ -4844,7 +5563,7 @@
 </p:sld>
 </file>
 
-<file path=ppt/slides/slide14.xml><?xml version="1.0" encoding="utf-8"?>
+<file path=ppt/slides/slide16.xml><?xml version="1.0" encoding="utf-8"?>
 <p:sld xmlns:a="http://schemas.openxmlformats.org/drawingml/2006/main" xmlns:r="http://schemas.openxmlformats.org/officeDocument/2006/relationships" xmlns:p="http://schemas.openxmlformats.org/presentationml/2006/main">
   <p:cSld>
     <p:spTree>
@@ -4902,14 +5621,81 @@
             </a:r>
             <a:r>
               <a:rPr lang="en-US" sz="1800" b="1" dirty="0"/>
-              <a:t>: (28 functions)</a:t>
-            </a:r>
-          </a:p>
-          <a:p>
-            <a:pPr algn="l"/>
-            <a:r>
-              <a:rPr lang="en-US" sz="1600" dirty="0"/>
-              <a:t>set_ROADM_path1_Z_port - </a:t>
+              <a:t>: (42 functions)</a:t>
+            </a:r>
+          </a:p>
+          <a:p>
+            <a:pPr algn="l"/>
+            <a:r>
+              <a:rPr lang="en-US" sz="1600" dirty="0"/>
+              <a:t>set_ROADM_path1_Z_device - ✅</a:t>
+            </a:r>
+          </a:p>
+          <a:p>
+            <a:pPr algn="l"/>
+            <a:r>
+              <a:rPr lang="en-US" sz="1600" dirty="0"/>
+              <a:t>set_ROADM_path1_Z_port - ✅</a:t>
+            </a:r>
+          </a:p>
+          <a:p>
+            <a:pPr algn="l"/>
+            <a:r>
+              <a:rPr lang="en-US" sz="1600" dirty="0"/>
+              <a:t>set_ROADM_path2_A_device - ✅</a:t>
+            </a:r>
+          </a:p>
+          <a:p>
+            <a:pPr algn="l"/>
+            <a:r>
+              <a:rPr lang="en-US" sz="1600" dirty="0"/>
+              <a:t>set_ROADM_path2_A_port - ✅</a:t>
+            </a:r>
+          </a:p>
+          <a:p>
+            <a:pPr algn="l"/>
+            <a:r>
+              <a:rPr lang="en-US" sz="1600" dirty="0"/>
+              <a:t>set_ROADM_path2_Z_device - ✅</a:t>
+            </a:r>
+          </a:p>
+          <a:p>
+            <a:pPr algn="l"/>
+            <a:r>
+              <a:rPr lang="en-US" sz="1600" dirty="0"/>
+              <a:t>set_ROADM_path2_Z_port - ✅</a:t>
+            </a:r>
+          </a:p>
+          <a:p>
+            <a:pPr algn="l"/>
+            <a:r>
+              <a:rPr lang="en-US" sz="1600" dirty="0"/>
+              <a:t>get_ROADM_path1_routes_table - ✅</a:t>
+            </a:r>
+          </a:p>
+          <a:p>
+            <a:pPr algn="l"/>
+            <a:r>
+              <a:rPr lang="en-US" sz="1600" dirty="0"/>
+              <a:t>ROADM_path1_click_on_route - ✅</a:t>
+            </a:r>
+          </a:p>
+          <a:p>
+            <a:pPr algn="l"/>
+            <a:r>
+              <a:rPr lang="en-US" sz="1600" dirty="0"/>
+              <a:t>set_ROADM_path1_channel - ✅</a:t>
+            </a:r>
+          </a:p>
+          <a:p>
+            <a:pPr algn="l"/>
+            <a:r>
+              <a:rPr lang="en-US" sz="1600" dirty="0" err="1"/>
+              <a:t>ROADM_service_create</a:t>
+            </a:r>
+            <a:r>
+              <a:rPr lang="en-US" sz="1600" dirty="0"/>
+              <a:t> - ✅</a:t>
             </a:r>
           </a:p>
           <a:p>
@@ -4920,6 +5706,28 @@
             </a:r>
             <a:r>
               <a:rPr lang="en-US" sz="1600" dirty="0"/>
+              <a:t> - ✅</a:t>
+            </a:r>
+          </a:p>
+          <a:p>
+            <a:pPr algn="l"/>
+            <a:r>
+              <a:rPr lang="en-US" sz="1600" dirty="0" err="1"/>
+              <a:t>set_OTN_A_port</a:t>
+            </a:r>
+            <a:r>
+              <a:rPr lang="en-US" sz="1600" dirty="0"/>
+              <a:t> - ✅</a:t>
+            </a:r>
+          </a:p>
+          <a:p>
+            <a:pPr algn="l"/>
+            <a:r>
+              <a:rPr lang="en-US" sz="1600" dirty="0" err="1"/>
+              <a:t>OTN_service_refresh</a:t>
+            </a:r>
+            <a:r>
+              <a:rPr lang="en-US" sz="1600" dirty="0"/>
               <a:t> -</a:t>
             </a:r>
           </a:p>
@@ -4927,7 +5735,149 @@
             <a:pPr algn="l"/>
             <a:r>
               <a:rPr lang="en-US" sz="1600" dirty="0" err="1"/>
-              <a:t>set_OTN_A_port</a:t>
+              <a:t>enable_OTN_protection</a:t>
+            </a:r>
+            <a:r>
+              <a:rPr lang="en-US" sz="1600" dirty="0"/>
+              <a:t> - ✅</a:t>
+            </a:r>
+          </a:p>
+          <a:p>
+            <a:pPr algn="l"/>
+            <a:r>
+              <a:rPr lang="en-US" sz="1600" dirty="0" err="1"/>
+              <a:t>disable_OTN_protection</a:t>
+            </a:r>
+            <a:r>
+              <a:rPr lang="en-US" sz="1600" dirty="0"/>
+              <a:t> - ✅</a:t>
+            </a:r>
+          </a:p>
+          <a:p>
+            <a:pPr algn="l"/>
+            <a:r>
+              <a:rPr lang="en-US" sz="1600" dirty="0" err="1"/>
+              <a:t>set_OTN_service_type</a:t>
+            </a:r>
+            <a:r>
+              <a:rPr lang="en-US" sz="1600" dirty="0"/>
+              <a:t> -</a:t>
+            </a:r>
+          </a:p>
+          <a:p>
+            <a:pPr algn="l"/>
+            <a:r>
+              <a:rPr lang="en-US" sz="1600" dirty="0" err="1"/>
+              <a:t>enable_OTN_rate_limit</a:t>
+            </a:r>
+            <a:r>
+              <a:rPr lang="en-US" sz="1600" dirty="0"/>
+              <a:t> - ✅</a:t>
+            </a:r>
+          </a:p>
+          <a:p>
+            <a:pPr algn="l"/>
+            <a:r>
+              <a:rPr lang="en-US" sz="1600" dirty="0" err="1"/>
+              <a:t>set_OTN_limit_to</a:t>
+            </a:r>
+            <a:r>
+              <a:rPr lang="en-US" sz="1600" dirty="0"/>
+              <a:t> - ✅</a:t>
+            </a:r>
+          </a:p>
+        </p:txBody>
+      </p:sp>
+    </p:spTree>
+    <p:extLst>
+      <p:ext uri="{BB962C8B-B14F-4D97-AF65-F5344CB8AC3E}">
+        <p14:creationId xmlns:p14="http://schemas.microsoft.com/office/powerpoint/2010/main" val="2928389014"/>
+      </p:ext>
+    </p:extLst>
+  </p:cSld>
+  <p:clrMapOvr>
+    <a:masterClrMapping/>
+  </p:clrMapOvr>
+</p:sld>
+</file>
+
+<file path=ppt/slides/slide17.xml><?xml version="1.0" encoding="utf-8"?>
+<p:sld xmlns:a="http://schemas.openxmlformats.org/drawingml/2006/main" xmlns:r="http://schemas.openxmlformats.org/officeDocument/2006/relationships" xmlns:p="http://schemas.openxmlformats.org/presentationml/2006/main">
+  <p:cSld>
+    <p:spTree>
+      <p:nvGrpSpPr>
+        <p:cNvPr id="1" name="">
+          <a:extLst>
+            <a:ext uri="{FF2B5EF4-FFF2-40B4-BE49-F238E27FC236}">
+              <a16:creationId xmlns:a16="http://schemas.microsoft.com/office/drawing/2014/main" id="{E240081D-C6E2-CE6D-64E7-766D3AA8988E}"/>
+            </a:ext>
+          </a:extLst>
+        </p:cNvPr>
+        <p:cNvGrpSpPr/>
+        <p:nvPr/>
+      </p:nvGrpSpPr>
+      <p:grpSpPr>
+        <a:xfrm>
+          <a:off x="0" y="0"/>
+          <a:ext cx="0" cy="0"/>
+          <a:chOff x="0" y="0"/>
+          <a:chExt cx="0" cy="0"/>
+        </a:xfrm>
+      </p:grpSpPr>
+      <p:sp>
+        <p:nvSpPr>
+          <p:cNvPr id="3" name="Subtitle 2">
+            <a:extLst>
+              <a:ext uri="{FF2B5EF4-FFF2-40B4-BE49-F238E27FC236}">
+                <a16:creationId xmlns:a16="http://schemas.microsoft.com/office/drawing/2014/main" id="{5C84F4B3-7218-0A59-D90B-90794FB495FD}"/>
+              </a:ext>
+            </a:extLst>
+          </p:cNvPr>
+          <p:cNvSpPr>
+            <a:spLocks noGrp="1"/>
+          </p:cNvSpPr>
+          <p:nvPr>
+            <p:ph type="subTitle" idx="1"/>
+          </p:nvPr>
+        </p:nvSpPr>
+        <p:spPr>
+          <a:xfrm>
+            <a:off x="106680" y="99886"/>
+            <a:ext cx="11990832" cy="6666674"/>
+          </a:xfrm>
+        </p:spPr>
+        <p:txBody>
+          <a:bodyPr>
+            <a:normAutofit/>
+          </a:bodyPr>
+          <a:lstStyle/>
+          <a:p>
+            <a:pPr algn="l"/>
+            <a:r>
+              <a:rPr lang="en-US" sz="1800" b="1" dirty="0" err="1"/>
+              <a:t>service_provisioning</a:t>
+            </a:r>
+            <a:r>
+              <a:rPr lang="en-US" sz="1800" b="1" dirty="0"/>
+              <a:t>: (42 functions)</a:t>
+            </a:r>
+          </a:p>
+          <a:p>
+            <a:pPr algn="l"/>
+            <a:r>
+              <a:rPr lang="en-US" sz="1600" dirty="0" err="1"/>
+              <a:t>disable_OTN_rate_limit</a:t>
+            </a:r>
+            <a:r>
+              <a:rPr lang="en-US" sz="1600" dirty="0"/>
+              <a:t> - ✅</a:t>
+            </a:r>
+          </a:p>
+          <a:p>
+            <a:pPr algn="l"/>
+            <a:r>
+              <a:rPr lang="en-US" sz="1600" dirty="0" err="1"/>
+              <a:t>set_OTN_Z_node</a:t>
             </a:r>
             <a:r>
               <a:rPr lang="en-US" sz="1600" dirty="0"/>
@@ -4938,82 +5888,45 @@
             <a:pPr algn="l"/>
             <a:r>
               <a:rPr lang="en-US" sz="1600" dirty="0" err="1"/>
-              <a:t>OTN_service_refresh</a:t>
-            </a:r>
-            <a:r>
-              <a:rPr lang="en-US" sz="1600" dirty="0"/>
-              <a:t> -</a:t>
-            </a:r>
-          </a:p>
-          <a:p>
-            <a:pPr algn="l"/>
-            <a:r>
-              <a:rPr lang="en-US" sz="1600" dirty="0" err="1"/>
-              <a:t>enable_OTN_protection</a:t>
-            </a:r>
-            <a:r>
-              <a:rPr lang="en-US" sz="1600" dirty="0"/>
-              <a:t> - ✅ </a:t>
-            </a:r>
-          </a:p>
-          <a:p>
-            <a:pPr algn="l"/>
-            <a:r>
-              <a:rPr lang="en-US" sz="1600" dirty="0" err="1"/>
-              <a:t>disable_OTN_protection</a:t>
-            </a:r>
-            <a:r>
-              <a:rPr lang="en-US" sz="1600" dirty="0"/>
-              <a:t> - ✅</a:t>
-            </a:r>
-          </a:p>
-          <a:p>
-            <a:pPr algn="l"/>
-            <a:r>
-              <a:rPr lang="en-US" sz="1600" dirty="0" err="1"/>
-              <a:t>set_OTN_service_type</a:t>
-            </a:r>
-            <a:r>
-              <a:rPr lang="en-US" sz="1600" dirty="0"/>
-              <a:t> -</a:t>
-            </a:r>
-          </a:p>
-          <a:p>
-            <a:pPr algn="l"/>
-            <a:r>
-              <a:rPr lang="en-US" sz="1600" dirty="0" err="1"/>
-              <a:t>enable_OTN_rate_limit</a:t>
-            </a:r>
-            <a:r>
-              <a:rPr lang="en-US" sz="1600" dirty="0"/>
-              <a:t> - ✅</a:t>
-            </a:r>
-          </a:p>
-          <a:p>
-            <a:pPr algn="l"/>
-            <a:r>
-              <a:rPr lang="en-US" sz="1600" dirty="0" err="1"/>
-              <a:t>set_OTN_limit_to</a:t>
-            </a:r>
-            <a:r>
-              <a:rPr lang="en-US" sz="1600" dirty="0"/>
-              <a:t> -</a:t>
-            </a:r>
-          </a:p>
-          <a:p>
-            <a:pPr algn="l"/>
-            <a:r>
-              <a:rPr lang="en-US" sz="1600" dirty="0" err="1"/>
-              <a:t>disable_OTN_rate_limit</a:t>
-            </a:r>
-            <a:r>
-              <a:rPr lang="en-US" sz="1600" dirty="0"/>
-              <a:t> - ✅</a:t>
-            </a:r>
-          </a:p>
-          <a:p>
-            <a:pPr algn="l"/>
-            <a:endParaRPr lang="en-US" sz="1600" dirty="0"/>
+              <a:t>set_OTN_Z_port</a:t>
+            </a:r>
+            <a:r>
+              <a:rPr lang="en-US" sz="1600" dirty="0"/>
+              <a:t> - </a:t>
+            </a:r>
+          </a:p>
+          <a:p>
+            <a:pPr algn="l"/>
+            <a:r>
+              <a:rPr lang="en-US" sz="1600" dirty="0" err="1"/>
+              <a:t>set_OTN_service_name</a:t>
+            </a:r>
+            <a:r>
+              <a:rPr lang="en-US" sz="1600" dirty="0"/>
+              <a:t> - ✅</a:t>
+            </a:r>
+          </a:p>
+          <a:p>
+            <a:pPr algn="l"/>
+            <a:r>
+              <a:rPr lang="en-US" sz="1600" dirty="0" err="1"/>
+              <a:t>enable_OTN_auto_path</a:t>
+            </a:r>
+            <a:r>
+              <a:rPr lang="en-US" sz="1600" dirty="0"/>
+              <a:t> - ✅</a:t>
+            </a:r>
+          </a:p>
+          <a:p>
+            <a:pPr algn="l"/>
+            <a:r>
+              <a:rPr lang="en-US" sz="1600" dirty="0" err="1"/>
+              <a:t>disable_OTN_auto_path</a:t>
+            </a:r>
+            <a:r>
+              <a:rPr lang="en-US" sz="1600" dirty="0"/>
+              <a:t> - ✅</a:t>
+            </a:r>
           </a:p>
           <a:p>
             <a:pPr algn="l"/>
@@ -5026,7 +5939,7 @@
           <p:cNvPr id="2" name="TextBox 1">
             <a:extLst>
               <a:ext uri="{FF2B5EF4-FFF2-40B4-BE49-F238E27FC236}">
-                <a16:creationId xmlns:a16="http://schemas.microsoft.com/office/drawing/2014/main" id="{2BF6C903-935D-114E-CAEA-48F38DD5332D}"/>
+                <a16:creationId xmlns:a16="http://schemas.microsoft.com/office/drawing/2014/main" id="{425DE282-514C-AD2C-15E6-64FD2AC10A9C}"/>
               </a:ext>
             </a:extLst>
           </p:cNvPr>
@@ -5055,7 +5968,7 @@
                   <a:srgbClr val="FFFF00"/>
                 </a:highlight>
               </a:rPr>
-              <a:t>Summary: 67%</a:t>
+              <a:t>Summary: 90%</a:t>
             </a:r>
             <a:endParaRPr lang="en-US" sz="1200" b="1" dirty="0">
               <a:highlight>
@@ -5068,7 +5981,7 @@
     </p:spTree>
     <p:extLst>
       <p:ext uri="{BB962C8B-B14F-4D97-AF65-F5344CB8AC3E}">
-        <p14:creationId xmlns:p14="http://schemas.microsoft.com/office/powerpoint/2010/main" val="2928389014"/>
+        <p14:creationId xmlns:p14="http://schemas.microsoft.com/office/powerpoint/2010/main" val="3342902364"/>
       </p:ext>
     </p:extLst>
   </p:cSld>
@@ -5078,7 +5991,7 @@
 </p:sld>
 </file>
 
-<file path=ppt/slides/slide15.xml><?xml version="1.0" encoding="utf-8"?>
+<file path=ppt/slides/slide18.xml><?xml version="1.0" encoding="utf-8"?>
 <p:sld xmlns:a="http://schemas.openxmlformats.org/drawingml/2006/main" xmlns:r="http://schemas.openxmlformats.org/officeDocument/2006/relationships" xmlns:p="http://schemas.openxmlformats.org/presentationml/2006/main">
   <p:cSld>
     <p:spTree>
@@ -5171,7 +6084,7 @@
 </p:sld>
 </file>
 
-<file path=ppt/slides/slide16.xml><?xml version="1.0" encoding="utf-8"?>
+<file path=ppt/slides/slide19.xml><?xml version="1.0" encoding="utf-8"?>
 <p:sld xmlns:a="http://schemas.openxmlformats.org/drawingml/2006/main" xmlns:r="http://schemas.openxmlformats.org/officeDocument/2006/relationships" xmlns:p="http://schemas.openxmlformats.org/presentationml/2006/main">
   <p:cSld>
     <p:spTree>
@@ -5225,15 +6138,335 @@
             <a:pPr algn="l"/>
             <a:r>
               <a:rPr lang="en-US" sz="1800" b="1" dirty="0"/>
-              <a:t>performance: (0 functions)</a:t>
-            </a:r>
-          </a:p>
-          <a:p>
-            <a:pPr algn="l"/>
-            <a:r>
-              <a:rPr lang="en-US" sz="1600" dirty="0"/>
-              <a:t>pass</a:t>
-            </a:r>
+              <a:t>performance: (20 functions)</a:t>
+            </a:r>
+          </a:p>
+          <a:p>
+            <a:pPr algn="l"/>
+            <a:r>
+              <a:rPr lang="en-US" sz="1600" dirty="0" err="1"/>
+              <a:t>set_display</a:t>
+            </a:r>
+            <a:r>
+              <a:rPr lang="en-US" sz="1600" dirty="0"/>
+              <a:t> - </a:t>
+            </a:r>
+          </a:p>
+          <a:p>
+            <a:pPr algn="l"/>
+            <a:r>
+              <a:rPr lang="en-US" sz="1600" dirty="0" err="1"/>
+              <a:t>get_display</a:t>
+            </a:r>
+            <a:r>
+              <a:rPr lang="en-US" sz="1600" dirty="0"/>
+              <a:t> -</a:t>
+            </a:r>
+          </a:p>
+          <a:p>
+            <a:pPr algn="l"/>
+            <a:r>
+              <a:rPr lang="en-US" sz="1600" dirty="0" err="1"/>
+              <a:t>set_period_start</a:t>
+            </a:r>
+            <a:r>
+              <a:rPr lang="en-US" sz="1600" dirty="0"/>
+              <a:t> - ✅</a:t>
+            </a:r>
+          </a:p>
+          <a:p>
+            <a:pPr algn="l"/>
+            <a:r>
+              <a:rPr lang="en-US" sz="1600" dirty="0" err="1"/>
+              <a:t>get_period_start</a:t>
+            </a:r>
+            <a:r>
+              <a:rPr lang="en-US" sz="1600" dirty="0"/>
+              <a:t> - ✅</a:t>
+            </a:r>
+          </a:p>
+          <a:p>
+            <a:pPr algn="l"/>
+            <a:r>
+              <a:rPr lang="en-US" sz="1600" dirty="0" err="1"/>
+              <a:t>set_period_end</a:t>
+            </a:r>
+            <a:r>
+              <a:rPr lang="en-US" sz="1600" dirty="0"/>
+              <a:t> - ✅</a:t>
+            </a:r>
+          </a:p>
+          <a:p>
+            <a:pPr algn="l"/>
+            <a:r>
+              <a:rPr lang="en-US" sz="1600" dirty="0" err="1"/>
+              <a:t>get_period_end</a:t>
+            </a:r>
+            <a:r>
+              <a:rPr lang="en-US" sz="1600" dirty="0"/>
+              <a:t> - ✅</a:t>
+            </a:r>
+          </a:p>
+          <a:p>
+            <a:pPr algn="l"/>
+            <a:r>
+              <a:rPr lang="en-US" sz="1600" dirty="0" err="1"/>
+              <a:t>set_device</a:t>
+            </a:r>
+            <a:r>
+              <a:rPr lang="en-US" sz="1600" dirty="0"/>
+              <a:t> - ✅</a:t>
+            </a:r>
+          </a:p>
+          <a:p>
+            <a:pPr algn="l"/>
+            <a:r>
+              <a:rPr lang="en-US" sz="1600" dirty="0" err="1"/>
+              <a:t>get_device</a:t>
+            </a:r>
+            <a:r>
+              <a:rPr lang="en-US" sz="1600" dirty="0"/>
+              <a:t> - ✅</a:t>
+            </a:r>
+          </a:p>
+          <a:p>
+            <a:pPr algn="l"/>
+            <a:r>
+              <a:rPr lang="en-US" sz="1600" dirty="0" err="1"/>
+              <a:t>set_port</a:t>
+            </a:r>
+            <a:r>
+              <a:rPr lang="en-US" sz="1600" dirty="0"/>
+              <a:t> - ✅</a:t>
+            </a:r>
+          </a:p>
+          <a:p>
+            <a:pPr algn="l"/>
+            <a:r>
+              <a:rPr lang="en-US" sz="1600" dirty="0" err="1"/>
+              <a:t>get_port</a:t>
+            </a:r>
+            <a:r>
+              <a:rPr lang="en-US" sz="1600" dirty="0"/>
+              <a:t> - ✅</a:t>
+            </a:r>
+          </a:p>
+          <a:p>
+            <a:pPr algn="l"/>
+            <a:r>
+              <a:rPr lang="en-US" sz="1600" dirty="0" err="1"/>
+              <a:t>set_pm_period_type</a:t>
+            </a:r>
+            <a:r>
+              <a:rPr lang="en-US" sz="1600" dirty="0"/>
+              <a:t> - ✅</a:t>
+            </a:r>
+          </a:p>
+          <a:p>
+            <a:pPr algn="l"/>
+            <a:r>
+              <a:rPr lang="en-US" sz="1600" dirty="0" err="1"/>
+              <a:t>get_pm_period_type</a:t>
+            </a:r>
+            <a:r>
+              <a:rPr lang="en-US" sz="1600" dirty="0"/>
+              <a:t> - ✅</a:t>
+            </a:r>
+          </a:p>
+          <a:p>
+            <a:pPr algn="l"/>
+            <a:r>
+              <a:rPr lang="en-US" sz="1600" dirty="0" err="1"/>
+              <a:t>set_pm_type</a:t>
+            </a:r>
+            <a:r>
+              <a:rPr lang="en-US" sz="1600" dirty="0"/>
+              <a:t> - ✅</a:t>
+            </a:r>
+          </a:p>
+          <a:p>
+            <a:pPr algn="l"/>
+            <a:r>
+              <a:rPr lang="en-US" sz="1600" dirty="0" err="1"/>
+              <a:t>get_pm_type</a:t>
+            </a:r>
+            <a:r>
+              <a:rPr lang="en-US" sz="1600" dirty="0"/>
+              <a:t> - ✅</a:t>
+            </a:r>
+          </a:p>
+          <a:p>
+            <a:pPr algn="l"/>
+            <a:r>
+              <a:rPr lang="en-US" sz="1600" dirty="0" err="1"/>
+              <a:t>get_pm_table</a:t>
+            </a:r>
+            <a:r>
+              <a:rPr lang="en-US" sz="1600" dirty="0"/>
+              <a:t> - ✅</a:t>
+            </a:r>
+          </a:p>
+          <a:p>
+            <a:pPr algn="l"/>
+            <a:r>
+              <a:rPr lang="en-US" sz="1600" dirty="0" err="1"/>
+              <a:t>click_previous</a:t>
+            </a:r>
+            <a:r>
+              <a:rPr lang="en-US" sz="1600" dirty="0"/>
+              <a:t> - ✅</a:t>
+            </a:r>
+          </a:p>
+          <a:p>
+            <a:pPr algn="l"/>
+            <a:r>
+              <a:rPr lang="en-US" sz="1600" dirty="0" err="1"/>
+              <a:t>click_next</a:t>
+            </a:r>
+            <a:r>
+              <a:rPr lang="en-US" sz="1600" dirty="0"/>
+              <a:t> - ✅</a:t>
+            </a:r>
+          </a:p>
+          <a:p>
+            <a:pPr algn="l"/>
+            <a:r>
+              <a:rPr lang="en-US" sz="1600" dirty="0" err="1"/>
+              <a:t>refresh_pm_table</a:t>
+            </a:r>
+            <a:r>
+              <a:rPr lang="en-US" sz="1600" dirty="0"/>
+              <a:t> - ✅</a:t>
+            </a:r>
+          </a:p>
+        </p:txBody>
+      </p:sp>
+    </p:spTree>
+    <p:extLst>
+      <p:ext uri="{BB962C8B-B14F-4D97-AF65-F5344CB8AC3E}">
+        <p14:creationId xmlns:p14="http://schemas.microsoft.com/office/powerpoint/2010/main" val="4052525924"/>
+      </p:ext>
+    </p:extLst>
+  </p:cSld>
+  <p:clrMapOvr>
+    <a:masterClrMapping/>
+  </p:clrMapOvr>
+</p:sld>
+</file>
+
+<file path=ppt/slides/slide2.xml><?xml version="1.0" encoding="utf-8"?>
+<p:sld xmlns:a="http://schemas.openxmlformats.org/drawingml/2006/main" xmlns:r="http://schemas.openxmlformats.org/officeDocument/2006/relationships" xmlns:p="http://schemas.openxmlformats.org/presentationml/2006/main">
+  <p:cSld>
+    <p:spTree>
+      <p:nvGrpSpPr>
+        <p:cNvPr id="1" name=""/>
+        <p:cNvGrpSpPr/>
+        <p:nvPr/>
+      </p:nvGrpSpPr>
+      <p:grpSpPr>
+        <a:xfrm>
+          <a:off x="0" y="0"/>
+          <a:ext cx="0" cy="0"/>
+          <a:chOff x="0" y="0"/>
+          <a:chExt cx="0" cy="0"/>
+        </a:xfrm>
+      </p:grpSpPr>
+      <p:sp>
+        <p:nvSpPr>
+          <p:cNvPr id="3" name="Subtitle 2">
+            <a:extLst>
+              <a:ext uri="{FF2B5EF4-FFF2-40B4-BE49-F238E27FC236}">
+                <a16:creationId xmlns:a16="http://schemas.microsoft.com/office/drawing/2014/main" id="{933A5C60-4C47-A859-5AF8-BA3EB255F843}"/>
+              </a:ext>
+            </a:extLst>
+          </p:cNvPr>
+          <p:cNvSpPr>
+            <a:spLocks noGrp="1"/>
+          </p:cNvSpPr>
+          <p:nvPr>
+            <p:ph type="subTitle" idx="1"/>
+          </p:nvPr>
+        </p:nvSpPr>
+        <p:spPr>
+          <a:xfrm>
+            <a:off x="106680" y="99886"/>
+            <a:ext cx="11990832" cy="6666674"/>
+          </a:xfrm>
+        </p:spPr>
+        <p:txBody>
+          <a:bodyPr>
+            <a:normAutofit/>
+          </a:bodyPr>
+          <a:lstStyle/>
+          <a:p>
+            <a:pPr algn="l"/>
+            <a:r>
+              <a:rPr lang="en-US" sz="1800" b="1" dirty="0" err="1"/>
+              <a:t>LoginPage</a:t>
+            </a:r>
+            <a:r>
+              <a:rPr lang="en-US" sz="1800" b="1" dirty="0"/>
+              <a:t>: (6 functions)</a:t>
+            </a:r>
+          </a:p>
+          <a:p>
+            <a:pPr algn="l"/>
+            <a:r>
+              <a:rPr lang="en-US" sz="1600" dirty="0"/>
+              <a:t>Init – ✅</a:t>
+            </a:r>
+            <a:endParaRPr lang="en-US" sz="1100" dirty="0"/>
+          </a:p>
+          <a:p>
+            <a:pPr algn="l"/>
+            <a:r>
+              <a:rPr lang="en-US" sz="1600" dirty="0" err="1"/>
+              <a:t>goto</a:t>
+            </a:r>
+            <a:r>
+              <a:rPr lang="en-US" sz="1600" dirty="0"/>
+              <a:t> – ✅</a:t>
+            </a:r>
+          </a:p>
+          <a:p>
+            <a:pPr algn="l"/>
+            <a:r>
+              <a:rPr lang="en-US" sz="1600" dirty="0"/>
+              <a:t>login – ✅</a:t>
+            </a:r>
+          </a:p>
+          <a:p>
+            <a:pPr algn="l"/>
+            <a:r>
+              <a:rPr lang="en-US" sz="1600" dirty="0"/>
+              <a:t>logout – ✅</a:t>
+            </a:r>
+          </a:p>
+          <a:p>
+            <a:pPr algn="l"/>
+            <a:r>
+              <a:rPr lang="en-US" sz="1600" dirty="0" err="1"/>
+              <a:t>click_reload_button</a:t>
+            </a:r>
+            <a:r>
+              <a:rPr lang="en-US" sz="1600" dirty="0"/>
+              <a:t> - ✅</a:t>
+            </a:r>
+          </a:p>
+          <a:p>
+            <a:pPr algn="l"/>
+            <a:r>
+              <a:rPr lang="en-US" sz="1600" dirty="0" err="1"/>
+              <a:t>clear_login_fields</a:t>
+            </a:r>
+            <a:r>
+              <a:rPr lang="en-US" sz="1600" dirty="0"/>
+              <a:t> - ✅</a:t>
+            </a:r>
+          </a:p>
+          <a:p>
+            <a:pPr algn="l"/>
+            <a:endParaRPr lang="en-US" sz="1600" dirty="0"/>
           </a:p>
           <a:p>
             <a:pPr algn="l"/>
@@ -5250,7 +6483,145 @@
           <p:cNvPr id="2" name="TextBox 1">
             <a:extLst>
               <a:ext uri="{FF2B5EF4-FFF2-40B4-BE49-F238E27FC236}">
-                <a16:creationId xmlns:a16="http://schemas.microsoft.com/office/drawing/2014/main" id="{DCCA1AD1-2C93-BF47-8C33-925EB29D908E}"/>
+                <a16:creationId xmlns:a16="http://schemas.microsoft.com/office/drawing/2014/main" id="{FEDF7320-6AB9-9263-E2A1-639D66C09407}"/>
+              </a:ext>
+            </a:extLst>
+          </p:cNvPr>
+          <p:cNvSpPr txBox="1"/>
+          <p:nvPr/>
+        </p:nvSpPr>
+        <p:spPr>
+          <a:xfrm>
+            <a:off x="10010968" y="352342"/>
+            <a:ext cx="1982724" cy="369332"/>
+          </a:xfrm>
+          <a:prstGeom prst="rect">
+            <a:avLst/>
+          </a:prstGeom>
+          <a:noFill/>
+        </p:spPr>
+        <p:txBody>
+          <a:bodyPr wrap="square" rtlCol="0">
+            <a:spAutoFit/>
+          </a:bodyPr>
+          <a:lstStyle/>
+          <a:p>
+            <a:r>
+              <a:rPr lang="en-US" b="1" dirty="0">
+                <a:highlight>
+                  <a:srgbClr val="00FF00"/>
+                </a:highlight>
+              </a:rPr>
+              <a:t>Summary: 100%</a:t>
+            </a:r>
+            <a:endParaRPr lang="en-US" sz="1200" b="1" dirty="0">
+              <a:highlight>
+                <a:srgbClr val="00FF00"/>
+              </a:highlight>
+            </a:endParaRPr>
+          </a:p>
+        </p:txBody>
+      </p:sp>
+    </p:spTree>
+    <p:extLst>
+      <p:ext uri="{BB962C8B-B14F-4D97-AF65-F5344CB8AC3E}">
+        <p14:creationId xmlns:p14="http://schemas.microsoft.com/office/powerpoint/2010/main" val="1250013317"/>
+      </p:ext>
+    </p:extLst>
+  </p:cSld>
+  <p:clrMapOvr>
+    <a:masterClrMapping/>
+  </p:clrMapOvr>
+</p:sld>
+</file>
+
+<file path=ppt/slides/slide20.xml><?xml version="1.0" encoding="utf-8"?>
+<p:sld xmlns:a="http://schemas.openxmlformats.org/drawingml/2006/main" xmlns:r="http://schemas.openxmlformats.org/officeDocument/2006/relationships" xmlns:p="http://schemas.openxmlformats.org/presentationml/2006/main">
+  <p:cSld>
+    <p:spTree>
+      <p:nvGrpSpPr>
+        <p:cNvPr id="1" name="">
+          <a:extLst>
+            <a:ext uri="{FF2B5EF4-FFF2-40B4-BE49-F238E27FC236}">
+              <a16:creationId xmlns:a16="http://schemas.microsoft.com/office/drawing/2014/main" id="{59FF81CD-F703-116E-6E20-4266719BAD23}"/>
+            </a:ext>
+          </a:extLst>
+        </p:cNvPr>
+        <p:cNvGrpSpPr/>
+        <p:nvPr/>
+      </p:nvGrpSpPr>
+      <p:grpSpPr>
+        <a:xfrm>
+          <a:off x="0" y="0"/>
+          <a:ext cx="0" cy="0"/>
+          <a:chOff x="0" y="0"/>
+          <a:chExt cx="0" cy="0"/>
+        </a:xfrm>
+      </p:grpSpPr>
+      <p:sp>
+        <p:nvSpPr>
+          <p:cNvPr id="3" name="Subtitle 2">
+            <a:extLst>
+              <a:ext uri="{FF2B5EF4-FFF2-40B4-BE49-F238E27FC236}">
+                <a16:creationId xmlns:a16="http://schemas.microsoft.com/office/drawing/2014/main" id="{80BC4AA7-2B8C-807B-210C-8CA4D8EA314F}"/>
+              </a:ext>
+            </a:extLst>
+          </p:cNvPr>
+          <p:cNvSpPr>
+            <a:spLocks noGrp="1"/>
+          </p:cNvSpPr>
+          <p:nvPr>
+            <p:ph type="subTitle" idx="1"/>
+          </p:nvPr>
+        </p:nvSpPr>
+        <p:spPr>
+          <a:xfrm>
+            <a:off x="106680" y="99886"/>
+            <a:ext cx="11990832" cy="6666674"/>
+          </a:xfrm>
+        </p:spPr>
+        <p:txBody>
+          <a:bodyPr>
+            <a:normAutofit/>
+          </a:bodyPr>
+          <a:lstStyle/>
+          <a:p>
+            <a:pPr algn="l"/>
+            <a:r>
+              <a:rPr lang="en-US" sz="1800" b="1" dirty="0"/>
+              <a:t>performance: (20 functions)</a:t>
+            </a:r>
+          </a:p>
+          <a:p>
+            <a:pPr algn="l"/>
+            <a:r>
+              <a:rPr lang="en-US" sz="1600" dirty="0" err="1"/>
+              <a:t>export_CSV</a:t>
+            </a:r>
+            <a:r>
+              <a:rPr lang="en-US" sz="1600" dirty="0"/>
+              <a:t> - ✅</a:t>
+            </a:r>
+          </a:p>
+          <a:p>
+            <a:pPr algn="l"/>
+            <a:r>
+              <a:rPr lang="en-US" sz="1600" dirty="0" err="1"/>
+              <a:t>verify_CSV_valid</a:t>
+            </a:r>
+            <a:r>
+              <a:rPr lang="en-US" sz="1600" dirty="0"/>
+              <a:t> -</a:t>
+            </a:r>
+          </a:p>
+        </p:txBody>
+      </p:sp>
+      <p:sp>
+        <p:nvSpPr>
+          <p:cNvPr id="2" name="TextBox 1">
+            <a:extLst>
+              <a:ext uri="{FF2B5EF4-FFF2-40B4-BE49-F238E27FC236}">
+                <a16:creationId xmlns:a16="http://schemas.microsoft.com/office/drawing/2014/main" id="{9156048A-C97D-6761-EBA3-401635C88BF2}"/>
               </a:ext>
             </a:extLst>
           </p:cNvPr>
@@ -5279,7 +6650,7 @@
                   <a:srgbClr val="FFFF00"/>
                 </a:highlight>
               </a:rPr>
-              <a:t>Summary: 0%</a:t>
+              <a:t>Summary: 85%</a:t>
             </a:r>
             <a:endParaRPr lang="en-US" sz="1200" b="1" dirty="0">
               <a:highlight>
@@ -5292,7 +6663,7 @@
     </p:spTree>
     <p:extLst>
       <p:ext uri="{BB962C8B-B14F-4D97-AF65-F5344CB8AC3E}">
-        <p14:creationId xmlns:p14="http://schemas.microsoft.com/office/powerpoint/2010/main" val="4052525924"/>
+        <p14:creationId xmlns:p14="http://schemas.microsoft.com/office/powerpoint/2010/main" val="625932548"/>
       </p:ext>
     </p:extLst>
   </p:cSld>
@@ -5302,7 +6673,7 @@
 </p:sld>
 </file>
 
-<file path=ppt/slides/slide17.xml><?xml version="1.0" encoding="utf-8"?>
+<file path=ppt/slides/slide21.xml><?xml version="1.0" encoding="utf-8"?>
 <p:sld xmlns:a="http://schemas.openxmlformats.org/drawingml/2006/main" xmlns:r="http://schemas.openxmlformats.org/officeDocument/2006/relationships" xmlns:p="http://schemas.openxmlformats.org/presentationml/2006/main">
   <p:cSld>
     <p:spTree>
@@ -5396,7 +6767,7 @@
 </p:sld>
 </file>
 
-<file path=ppt/slides/slide18.xml><?xml version="1.0" encoding="utf-8"?>
+<file path=ppt/slides/slide22.xml><?xml version="1.0" encoding="utf-8"?>
 <p:sld xmlns:a="http://schemas.openxmlformats.org/drawingml/2006/main" xmlns:r="http://schemas.openxmlformats.org/officeDocument/2006/relationships" xmlns:p="http://schemas.openxmlformats.org/presentationml/2006/main">
   <p:cSld>
     <p:spTree>
@@ -5454,7 +6825,7 @@
             </a:r>
             <a:r>
               <a:rPr lang="en-US" sz="1800" b="1" dirty="0"/>
-              <a:t>: (51 functions)</a:t>
+              <a:t>: (47 functions)</a:t>
             </a:r>
           </a:p>
           <a:p>
@@ -5654,7 +7025,7 @@
 </p:sld>
 </file>
 
-<file path=ppt/slides/slide19.xml><?xml version="1.0" encoding="utf-8"?>
+<file path=ppt/slides/slide23.xml><?xml version="1.0" encoding="utf-8"?>
 <p:sld xmlns:a="http://schemas.openxmlformats.org/drawingml/2006/main" xmlns:r="http://schemas.openxmlformats.org/officeDocument/2006/relationships" xmlns:p="http://schemas.openxmlformats.org/presentationml/2006/main">
   <p:cSld>
     <p:spTree>
@@ -5712,7 +7083,7 @@
             </a:r>
             <a:r>
               <a:rPr lang="en-US" sz="1800" b="1" dirty="0"/>
-              <a:t>: (51 functions)</a:t>
+              <a:t>: (47 functions)</a:t>
             </a:r>
           </a:p>
           <a:p>
@@ -5860,188 +7231,7 @@
 </p:sld>
 </file>
 
-<file path=ppt/slides/slide2.xml><?xml version="1.0" encoding="utf-8"?>
-<p:sld xmlns:a="http://schemas.openxmlformats.org/drawingml/2006/main" xmlns:r="http://schemas.openxmlformats.org/officeDocument/2006/relationships" xmlns:p="http://schemas.openxmlformats.org/presentationml/2006/main">
-  <p:cSld>
-    <p:spTree>
-      <p:nvGrpSpPr>
-        <p:cNvPr id="1" name=""/>
-        <p:cNvGrpSpPr/>
-        <p:nvPr/>
-      </p:nvGrpSpPr>
-      <p:grpSpPr>
-        <a:xfrm>
-          <a:off x="0" y="0"/>
-          <a:ext cx="0" cy="0"/>
-          <a:chOff x="0" y="0"/>
-          <a:chExt cx="0" cy="0"/>
-        </a:xfrm>
-      </p:grpSpPr>
-      <p:sp>
-        <p:nvSpPr>
-          <p:cNvPr id="3" name="Subtitle 2">
-            <a:extLst>
-              <a:ext uri="{FF2B5EF4-FFF2-40B4-BE49-F238E27FC236}">
-                <a16:creationId xmlns:a16="http://schemas.microsoft.com/office/drawing/2014/main" id="{933A5C60-4C47-A859-5AF8-BA3EB255F843}"/>
-              </a:ext>
-            </a:extLst>
-          </p:cNvPr>
-          <p:cNvSpPr>
-            <a:spLocks noGrp="1"/>
-          </p:cNvSpPr>
-          <p:nvPr>
-            <p:ph type="subTitle" idx="1"/>
-          </p:nvPr>
-        </p:nvSpPr>
-        <p:spPr>
-          <a:xfrm>
-            <a:off x="106680" y="99886"/>
-            <a:ext cx="11990832" cy="6666674"/>
-          </a:xfrm>
-        </p:spPr>
-        <p:txBody>
-          <a:bodyPr>
-            <a:normAutofit/>
-          </a:bodyPr>
-          <a:lstStyle/>
-          <a:p>
-            <a:pPr algn="l"/>
-            <a:r>
-              <a:rPr lang="en-US" sz="1800" b="1" dirty="0" err="1"/>
-              <a:t>LoginPage</a:t>
-            </a:r>
-            <a:r>
-              <a:rPr lang="en-US" sz="1800" b="1" dirty="0"/>
-              <a:t>: (6 functions)</a:t>
-            </a:r>
-          </a:p>
-          <a:p>
-            <a:pPr algn="l"/>
-            <a:r>
-              <a:rPr lang="en-US" sz="1600" dirty="0"/>
-              <a:t>Init – ✅</a:t>
-            </a:r>
-            <a:endParaRPr lang="en-US" sz="1100" dirty="0"/>
-          </a:p>
-          <a:p>
-            <a:pPr algn="l"/>
-            <a:r>
-              <a:rPr lang="en-US" sz="1600" dirty="0" err="1"/>
-              <a:t>goto</a:t>
-            </a:r>
-            <a:r>
-              <a:rPr lang="en-US" sz="1600" dirty="0"/>
-              <a:t> – ✅</a:t>
-            </a:r>
-          </a:p>
-          <a:p>
-            <a:pPr algn="l"/>
-            <a:r>
-              <a:rPr lang="en-US" sz="1600" dirty="0"/>
-              <a:t>login – ✅</a:t>
-            </a:r>
-          </a:p>
-          <a:p>
-            <a:pPr algn="l"/>
-            <a:r>
-              <a:rPr lang="en-US" sz="1600" dirty="0"/>
-              <a:t>logout – ✅</a:t>
-            </a:r>
-          </a:p>
-          <a:p>
-            <a:pPr algn="l"/>
-            <a:r>
-              <a:rPr lang="en-US" sz="1600" dirty="0" err="1"/>
-              <a:t>click_reload_button</a:t>
-            </a:r>
-            <a:r>
-              <a:rPr lang="en-US" sz="1600" dirty="0"/>
-              <a:t> - ✅</a:t>
-            </a:r>
-          </a:p>
-          <a:p>
-            <a:pPr algn="l"/>
-            <a:r>
-              <a:rPr lang="en-US" sz="1600" dirty="0" err="1"/>
-              <a:t>clear_login_fields</a:t>
-            </a:r>
-            <a:r>
-              <a:rPr lang="en-US" sz="1600" dirty="0"/>
-              <a:t> - ✅</a:t>
-            </a:r>
-          </a:p>
-          <a:p>
-            <a:pPr algn="l"/>
-            <a:endParaRPr lang="en-US" sz="1600" dirty="0"/>
-          </a:p>
-          <a:p>
-            <a:pPr algn="l"/>
-            <a:endParaRPr lang="en-US" sz="1600" dirty="0"/>
-          </a:p>
-          <a:p>
-            <a:pPr algn="l"/>
-            <a:endParaRPr lang="en-US" sz="1600" dirty="0"/>
-          </a:p>
-        </p:txBody>
-      </p:sp>
-      <p:sp>
-        <p:nvSpPr>
-          <p:cNvPr id="2" name="TextBox 1">
-            <a:extLst>
-              <a:ext uri="{FF2B5EF4-FFF2-40B4-BE49-F238E27FC236}">
-                <a16:creationId xmlns:a16="http://schemas.microsoft.com/office/drawing/2014/main" id="{FEDF7320-6AB9-9263-E2A1-639D66C09407}"/>
-              </a:ext>
-            </a:extLst>
-          </p:cNvPr>
-          <p:cNvSpPr txBox="1"/>
-          <p:nvPr/>
-        </p:nvSpPr>
-        <p:spPr>
-          <a:xfrm>
-            <a:off x="10010968" y="352342"/>
-            <a:ext cx="1982724" cy="369332"/>
-          </a:xfrm>
-          <a:prstGeom prst="rect">
-            <a:avLst/>
-          </a:prstGeom>
-          <a:noFill/>
-        </p:spPr>
-        <p:txBody>
-          <a:bodyPr wrap="square" rtlCol="0">
-            <a:spAutoFit/>
-          </a:bodyPr>
-          <a:lstStyle/>
-          <a:p>
-            <a:r>
-              <a:rPr lang="en-US" b="1" dirty="0">
-                <a:highlight>
-                  <a:srgbClr val="00FF00"/>
-                </a:highlight>
-              </a:rPr>
-              <a:t>Summary: 100%</a:t>
-            </a:r>
-            <a:endParaRPr lang="en-US" sz="1200" b="1" dirty="0">
-              <a:highlight>
-                <a:srgbClr val="00FF00"/>
-              </a:highlight>
-            </a:endParaRPr>
-          </a:p>
-        </p:txBody>
-      </p:sp>
-    </p:spTree>
-    <p:extLst>
-      <p:ext uri="{BB962C8B-B14F-4D97-AF65-F5344CB8AC3E}">
-        <p14:creationId xmlns:p14="http://schemas.microsoft.com/office/powerpoint/2010/main" val="1250013317"/>
-      </p:ext>
-    </p:extLst>
-  </p:cSld>
-  <p:clrMapOvr>
-    <a:masterClrMapping/>
-  </p:clrMapOvr>
-</p:sld>
-</file>
-
-<file path=ppt/slides/slide20.xml><?xml version="1.0" encoding="utf-8"?>
+<file path=ppt/slides/slide24.xml><?xml version="1.0" encoding="utf-8"?>
 <p:sld xmlns:a="http://schemas.openxmlformats.org/drawingml/2006/main" xmlns:r="http://schemas.openxmlformats.org/officeDocument/2006/relationships" xmlns:p="http://schemas.openxmlformats.org/presentationml/2006/main">
   <p:cSld>
     <p:spTree>
@@ -6099,7 +7289,7 @@
             </a:r>
             <a:r>
               <a:rPr lang="en-US" sz="1800" b="1" dirty="0"/>
-              <a:t>: (51 functions)</a:t>
+              <a:t>: (47 functions)</a:t>
             </a:r>
           </a:p>
           <a:p>
@@ -6275,7 +7465,7 @@
 </p:sld>
 </file>
 
-<file path=ppt/slides/slide21.xml><?xml version="1.0" encoding="utf-8"?>
+<file path=ppt/slides/slide25.xml><?xml version="1.0" encoding="utf-8"?>
 <p:sld xmlns:a="http://schemas.openxmlformats.org/drawingml/2006/main" xmlns:r="http://schemas.openxmlformats.org/officeDocument/2006/relationships" xmlns:p="http://schemas.openxmlformats.org/presentationml/2006/main">
   <p:cSld>
     <p:spTree>
@@ -6369,7 +7559,7 @@
 </p:sld>
 </file>
 
-<file path=ppt/slides/slide22.xml><?xml version="1.0" encoding="utf-8"?>
+<file path=ppt/slides/slide26.xml><?xml version="1.0" encoding="utf-8"?>
 <p:sld xmlns:a="http://schemas.openxmlformats.org/drawingml/2006/main" xmlns:r="http://schemas.openxmlformats.org/officeDocument/2006/relationships" xmlns:p="http://schemas.openxmlformats.org/presentationml/2006/main">
   <p:cSld>
     <p:spTree>
@@ -6511,7 +7701,7 @@
             <a:pPr algn="l"/>
             <a:r>
               <a:rPr lang="en-US" sz="1600" dirty="0" err="1"/>
-              <a:t>rename_domain</a:t>
+              <a:t>rename_chassis</a:t>
             </a:r>
             <a:r>
               <a:rPr lang="en-US" sz="1600" dirty="0"/>
@@ -6629,7 +7819,7 @@
 </p:sld>
 </file>
 
-<file path=ppt/slides/slide23.xml><?xml version="1.0" encoding="utf-8"?>
+<file path=ppt/slides/slide27.xml><?xml version="1.0" encoding="utf-8"?>
 <p:sld xmlns:a="http://schemas.openxmlformats.org/drawingml/2006/main" xmlns:r="http://schemas.openxmlformats.org/officeDocument/2006/relationships" xmlns:p="http://schemas.openxmlformats.org/presentationml/2006/main">
   <p:cSld>
     <p:spTree>
@@ -6722,7 +7912,7 @@
 </p:sld>
 </file>
 
-<file path=ppt/slides/slide24.xml><?xml version="1.0" encoding="utf-8"?>
+<file path=ppt/slides/slide28.xml><?xml version="1.0" encoding="utf-8"?>
 <p:sld xmlns:a="http://schemas.openxmlformats.org/drawingml/2006/main" xmlns:r="http://schemas.openxmlformats.org/officeDocument/2006/relationships" xmlns:p="http://schemas.openxmlformats.org/presentationml/2006/main">
   <p:cSld>
     <p:spTree>
@@ -6853,7 +8043,7 @@
 </p:sld>
 </file>
 
-<file path=ppt/slides/slide25.xml><?xml version="1.0" encoding="utf-8"?>
+<file path=ppt/slides/slide29.xml><?xml version="1.0" encoding="utf-8"?>
 <p:sld xmlns:a="http://schemas.openxmlformats.org/drawingml/2006/main" xmlns:r="http://schemas.openxmlformats.org/officeDocument/2006/relationships" xmlns:p="http://schemas.openxmlformats.org/presentationml/2006/main">
   <p:cSld>
     <p:spTree>
@@ -6937,919 +8127,6 @@
     <p:extLst>
       <p:ext uri="{BB962C8B-B14F-4D97-AF65-F5344CB8AC3E}">
         <p14:creationId xmlns:p14="http://schemas.microsoft.com/office/powerpoint/2010/main" val="980340704"/>
-      </p:ext>
-    </p:extLst>
-  </p:cSld>
-  <p:clrMapOvr>
-    <a:masterClrMapping/>
-  </p:clrMapOvr>
-</p:sld>
-</file>
-
-<file path=ppt/slides/slide26.xml><?xml version="1.0" encoding="utf-8"?>
-<p:sld xmlns:a="http://schemas.openxmlformats.org/drawingml/2006/main" xmlns:r="http://schemas.openxmlformats.org/officeDocument/2006/relationships" xmlns:p="http://schemas.openxmlformats.org/presentationml/2006/main">
-  <p:cSld>
-    <p:spTree>
-      <p:nvGrpSpPr>
-        <p:cNvPr id="1" name="">
-          <a:extLst>
-            <a:ext uri="{FF2B5EF4-FFF2-40B4-BE49-F238E27FC236}">
-              <a16:creationId xmlns:a16="http://schemas.microsoft.com/office/drawing/2014/main" id="{5F4DC67A-AF95-0186-BD33-47412C30A9C2}"/>
-            </a:ext>
-          </a:extLst>
-        </p:cNvPr>
-        <p:cNvGrpSpPr/>
-        <p:nvPr/>
-      </p:nvGrpSpPr>
-      <p:grpSpPr>
-        <a:xfrm>
-          <a:off x="0" y="0"/>
-          <a:ext cx="0" cy="0"/>
-          <a:chOff x="0" y="0"/>
-          <a:chExt cx="0" cy="0"/>
-        </a:xfrm>
-      </p:grpSpPr>
-      <p:sp>
-        <p:nvSpPr>
-          <p:cNvPr id="3" name="Subtitle 2">
-            <a:extLst>
-              <a:ext uri="{FF2B5EF4-FFF2-40B4-BE49-F238E27FC236}">
-                <a16:creationId xmlns:a16="http://schemas.microsoft.com/office/drawing/2014/main" id="{E4F94C5B-296F-4A40-A2ED-2F54D51EF13D}"/>
-              </a:ext>
-            </a:extLst>
-          </p:cNvPr>
-          <p:cNvSpPr>
-            <a:spLocks noGrp="1"/>
-          </p:cNvSpPr>
-          <p:nvPr>
-            <p:ph type="subTitle" idx="1"/>
-          </p:nvPr>
-        </p:nvSpPr>
-        <p:spPr>
-          <a:xfrm>
-            <a:off x="106680" y="99886"/>
-            <a:ext cx="11990832" cy="6666674"/>
-          </a:xfrm>
-        </p:spPr>
-        <p:txBody>
-          <a:bodyPr>
-            <a:normAutofit lnSpcReduction="10000"/>
-          </a:bodyPr>
-          <a:lstStyle/>
-          <a:p>
-            <a:pPr algn="l"/>
-            <a:r>
-              <a:rPr lang="en-US" sz="1800" b="1" dirty="0" err="1"/>
-              <a:t>Alarms_and_events</a:t>
-            </a:r>
-            <a:r>
-              <a:rPr lang="en-US" sz="1800" b="1" dirty="0"/>
-              <a:t>: (44 functions)</a:t>
-            </a:r>
-          </a:p>
-          <a:p>
-            <a:pPr algn="l"/>
-            <a:r>
-              <a:rPr lang="en-US" sz="1600" dirty="0" err="1"/>
-              <a:t>set_faults_type</a:t>
-            </a:r>
-            <a:r>
-              <a:rPr lang="en-US" sz="1600" dirty="0"/>
-              <a:t> – ✅</a:t>
-            </a:r>
-          </a:p>
-          <a:p>
-            <a:pPr algn="l"/>
-            <a:r>
-              <a:rPr lang="en-US" sz="1600" dirty="0" err="1"/>
-              <a:t>get_faults_type</a:t>
-            </a:r>
-            <a:r>
-              <a:rPr lang="en-US" sz="1600" dirty="0"/>
-              <a:t> – ✅</a:t>
-            </a:r>
-          </a:p>
-          <a:p>
-            <a:pPr algn="l"/>
-            <a:r>
-              <a:rPr lang="en-US" sz="1600" dirty="0" err="1"/>
-              <a:t>set_severity</a:t>
-            </a:r>
-            <a:r>
-              <a:rPr lang="en-US" sz="1600" dirty="0"/>
-              <a:t> – ✅</a:t>
-            </a:r>
-          </a:p>
-          <a:p>
-            <a:pPr algn="l"/>
-            <a:r>
-              <a:rPr lang="en-US" sz="1600" dirty="0" err="1"/>
-              <a:t>get_severity</a:t>
-            </a:r>
-            <a:r>
-              <a:rPr lang="en-US" sz="1600" dirty="0"/>
-              <a:t> – ✅</a:t>
-            </a:r>
-          </a:p>
-          <a:p>
-            <a:pPr algn="l"/>
-            <a:r>
-              <a:rPr lang="en-US" sz="1600" dirty="0" err="1"/>
-              <a:t>set_all_severities</a:t>
-            </a:r>
-            <a:r>
-              <a:rPr lang="en-US" sz="1600" dirty="0"/>
-              <a:t> - ✅</a:t>
-            </a:r>
-          </a:p>
-          <a:p>
-            <a:pPr algn="l"/>
-            <a:r>
-              <a:rPr lang="en-US" sz="1600" dirty="0" err="1"/>
-              <a:t>set_category</a:t>
-            </a:r>
-            <a:r>
-              <a:rPr lang="en-US" sz="1600" dirty="0"/>
-              <a:t> – ✅</a:t>
-            </a:r>
-          </a:p>
-          <a:p>
-            <a:pPr algn="l"/>
-            <a:r>
-              <a:rPr lang="en-US" sz="1600" dirty="0" err="1"/>
-              <a:t>get_category</a:t>
-            </a:r>
-            <a:r>
-              <a:rPr lang="en-US" sz="1600" dirty="0"/>
-              <a:t> – ✅</a:t>
-            </a:r>
-          </a:p>
-          <a:p>
-            <a:pPr algn="l"/>
-            <a:r>
-              <a:rPr lang="en-US" sz="1600" dirty="0" err="1"/>
-              <a:t>set_all_categories</a:t>
-            </a:r>
-            <a:r>
-              <a:rPr lang="en-US" sz="1600" dirty="0"/>
-              <a:t> - ✅</a:t>
-            </a:r>
-          </a:p>
-          <a:p>
-            <a:pPr algn="l"/>
-            <a:r>
-              <a:rPr lang="en-US" sz="1600" dirty="0" err="1"/>
-              <a:t>set_filterBy</a:t>
-            </a:r>
-            <a:r>
-              <a:rPr lang="en-US" sz="1600" dirty="0"/>
-              <a:t> – ✅</a:t>
-            </a:r>
-          </a:p>
-          <a:p>
-            <a:pPr algn="l"/>
-            <a:r>
-              <a:rPr lang="en-US" sz="1600" dirty="0" err="1"/>
-              <a:t>get_filterBy</a:t>
-            </a:r>
-            <a:r>
-              <a:rPr lang="en-US" sz="1600" dirty="0"/>
-              <a:t> – ✅</a:t>
-            </a:r>
-          </a:p>
-          <a:p>
-            <a:pPr algn="l"/>
-            <a:r>
-              <a:rPr lang="en-US" sz="1600" dirty="0" err="1"/>
-              <a:t>set_all_devices_filterBy_devices</a:t>
-            </a:r>
-            <a:r>
-              <a:rPr lang="en-US" sz="1600" dirty="0"/>
-              <a:t>(when Filter by is on Devices) – ✅</a:t>
-            </a:r>
-          </a:p>
-          <a:p>
-            <a:pPr algn="l"/>
-            <a:r>
-              <a:rPr lang="en-US" sz="1600" dirty="0" err="1"/>
-              <a:t>get_all_selected_devices_filterBy_devices</a:t>
-            </a:r>
-            <a:r>
-              <a:rPr lang="en-US" sz="1600" dirty="0"/>
-              <a:t>(when Filter by is on Devices) – ✅</a:t>
-            </a:r>
-          </a:p>
-          <a:p>
-            <a:pPr algn="l"/>
-            <a:r>
-              <a:rPr lang="en-US" sz="1600" dirty="0" err="1"/>
-              <a:t>select_device_filterBy_devices</a:t>
-            </a:r>
-            <a:r>
-              <a:rPr lang="en-US" sz="1600" dirty="0"/>
-              <a:t>(when Filter by is on Devices) – ✅</a:t>
-            </a:r>
-          </a:p>
-          <a:p>
-            <a:pPr algn="l"/>
-            <a:r>
-              <a:rPr lang="en-US" sz="1600" dirty="0" err="1"/>
-              <a:t>close_devices_dropdown</a:t>
-            </a:r>
-            <a:r>
-              <a:rPr lang="en-US" sz="1600" dirty="0"/>
-              <a:t> - ✅</a:t>
-            </a:r>
-          </a:p>
-          <a:p>
-            <a:pPr algn="l"/>
-            <a:r>
-              <a:rPr lang="en-US" sz="1600" dirty="0" err="1"/>
-              <a:t>remove_device_filterBy_devices</a:t>
-            </a:r>
-            <a:r>
-              <a:rPr lang="en-US" sz="1600" dirty="0"/>
-              <a:t>(when Filter by is on Devices) – ✅</a:t>
-            </a:r>
-          </a:p>
-          <a:p>
-            <a:pPr algn="l"/>
-            <a:r>
-              <a:rPr lang="en-US" sz="1600" dirty="0" err="1"/>
-              <a:t>remove_all_devices_filterBy_devices</a:t>
-            </a:r>
-            <a:r>
-              <a:rPr lang="en-US" sz="1600" dirty="0"/>
-              <a:t>(when Filter by is on Devices) - ✅</a:t>
-            </a:r>
-          </a:p>
-          <a:p>
-            <a:pPr algn="l"/>
-            <a:r>
-              <a:rPr lang="en-US" sz="1600" dirty="0" err="1"/>
-              <a:t>select_domain_or_chassis_filterBy_domain_or_chassis</a:t>
-            </a:r>
-            <a:r>
-              <a:rPr lang="en-US" sz="1600" dirty="0"/>
-              <a:t>(when Filter by is on Domain/chassis) – ✅</a:t>
-            </a:r>
-          </a:p>
-          <a:p>
-            <a:pPr algn="l"/>
-            <a:r>
-              <a:rPr lang="en-US" sz="1600" dirty="0" err="1"/>
-              <a:t>get_selected_domain_or_chassis_filterBy_domain_or_chassis</a:t>
-            </a:r>
-            <a:r>
-              <a:rPr lang="en-US" sz="1600" dirty="0"/>
-              <a:t>(when Filter by is on Domain/chassis) – ✅</a:t>
-            </a:r>
-          </a:p>
-          <a:p>
-            <a:pPr algn="l"/>
-            <a:r>
-              <a:rPr lang="en-US" sz="1600" dirty="0" err="1"/>
-              <a:t>select_all_domains_filterBy_domain_or_chassis</a:t>
-            </a:r>
-            <a:r>
-              <a:rPr lang="en-US" sz="1600" dirty="0"/>
-              <a:t>(when Filter by is on Domain/chassis) - ✅</a:t>
-            </a:r>
-          </a:p>
-          <a:p>
-            <a:pPr algn="l"/>
-            <a:endParaRPr lang="en-US" sz="1600" dirty="0"/>
-          </a:p>
-          <a:p>
-            <a:pPr algn="l"/>
-            <a:endParaRPr lang="en-US" sz="1600" dirty="0"/>
-          </a:p>
-          <a:p>
-            <a:pPr algn="l"/>
-            <a:endParaRPr lang="en-US" sz="1600" dirty="0"/>
-          </a:p>
-          <a:p>
-            <a:pPr algn="l"/>
-            <a:endParaRPr lang="en-US" sz="1600" dirty="0"/>
-          </a:p>
-        </p:txBody>
-      </p:sp>
-    </p:spTree>
-    <p:extLst>
-      <p:ext uri="{BB962C8B-B14F-4D97-AF65-F5344CB8AC3E}">
-        <p14:creationId xmlns:p14="http://schemas.microsoft.com/office/powerpoint/2010/main" val="406930974"/>
-      </p:ext>
-    </p:extLst>
-  </p:cSld>
-  <p:clrMapOvr>
-    <a:masterClrMapping/>
-  </p:clrMapOvr>
-</p:sld>
-</file>
-
-<file path=ppt/slides/slide27.xml><?xml version="1.0" encoding="utf-8"?>
-<p:sld xmlns:a="http://schemas.openxmlformats.org/drawingml/2006/main" xmlns:r="http://schemas.openxmlformats.org/officeDocument/2006/relationships" xmlns:p="http://schemas.openxmlformats.org/presentationml/2006/main">
-  <p:cSld>
-    <p:spTree>
-      <p:nvGrpSpPr>
-        <p:cNvPr id="1" name="">
-          <a:extLst>
-            <a:ext uri="{FF2B5EF4-FFF2-40B4-BE49-F238E27FC236}">
-              <a16:creationId xmlns:a16="http://schemas.microsoft.com/office/drawing/2014/main" id="{DC1D1432-91F2-3424-F82D-3403B895C19E}"/>
-            </a:ext>
-          </a:extLst>
-        </p:cNvPr>
-        <p:cNvGrpSpPr/>
-        <p:nvPr/>
-      </p:nvGrpSpPr>
-      <p:grpSpPr>
-        <a:xfrm>
-          <a:off x="0" y="0"/>
-          <a:ext cx="0" cy="0"/>
-          <a:chOff x="0" y="0"/>
-          <a:chExt cx="0" cy="0"/>
-        </a:xfrm>
-      </p:grpSpPr>
-      <p:sp>
-        <p:nvSpPr>
-          <p:cNvPr id="3" name="Subtitle 2">
-            <a:extLst>
-              <a:ext uri="{FF2B5EF4-FFF2-40B4-BE49-F238E27FC236}">
-                <a16:creationId xmlns:a16="http://schemas.microsoft.com/office/drawing/2014/main" id="{8527567B-287A-D08E-0E39-C833D8C1CD93}"/>
-              </a:ext>
-            </a:extLst>
-          </p:cNvPr>
-          <p:cNvSpPr>
-            <a:spLocks noGrp="1"/>
-          </p:cNvSpPr>
-          <p:nvPr>
-            <p:ph type="subTitle" idx="1"/>
-          </p:nvPr>
-        </p:nvSpPr>
-        <p:spPr>
-          <a:xfrm>
-            <a:off x="106680" y="99886"/>
-            <a:ext cx="11990832" cy="6666674"/>
-          </a:xfrm>
-        </p:spPr>
-        <p:txBody>
-          <a:bodyPr>
-            <a:normAutofit/>
-          </a:bodyPr>
-          <a:lstStyle/>
-          <a:p>
-            <a:pPr algn="l"/>
-            <a:r>
-              <a:rPr lang="en-US" sz="1800" b="1" dirty="0" err="1"/>
-              <a:t>Alarms_and_events</a:t>
-            </a:r>
-            <a:r>
-              <a:rPr lang="en-US" sz="1800" b="1" dirty="0"/>
-              <a:t>: (44 functions)</a:t>
-            </a:r>
-          </a:p>
-          <a:p>
-            <a:pPr algn="l"/>
-            <a:r>
-              <a:rPr lang="en-US" sz="1600" dirty="0" err="1"/>
-              <a:t>select_devices_type_filterBy_device_type</a:t>
-            </a:r>
-            <a:r>
-              <a:rPr lang="en-US" sz="1600" dirty="0"/>
-              <a:t> - ✅</a:t>
-            </a:r>
-          </a:p>
-          <a:p>
-            <a:pPr algn="l"/>
-            <a:r>
-              <a:rPr lang="en-US" sz="1600" dirty="0" err="1"/>
-              <a:t>get_selected_devices_type_filterBy_device_type</a:t>
-            </a:r>
-            <a:r>
-              <a:rPr lang="en-US" sz="1600" dirty="0"/>
-              <a:t> - ✅</a:t>
-            </a:r>
-          </a:p>
-          <a:p>
-            <a:pPr algn="l"/>
-            <a:r>
-              <a:rPr lang="en-US" sz="1600" dirty="0" err="1"/>
-              <a:t>select_all_devices_type_filterBy_device_type</a:t>
-            </a:r>
-            <a:r>
-              <a:rPr lang="en-US" sz="1600" dirty="0"/>
-              <a:t> - ✅</a:t>
-            </a:r>
-          </a:p>
-          <a:p>
-            <a:pPr algn="l"/>
-            <a:r>
-              <a:rPr lang="en-US" sz="1600" dirty="0" err="1"/>
-              <a:t>set_from_date</a:t>
-            </a:r>
-            <a:r>
-              <a:rPr lang="en-US" sz="1600" dirty="0"/>
-              <a:t> – ✅</a:t>
-            </a:r>
-          </a:p>
-          <a:p>
-            <a:pPr algn="l"/>
-            <a:r>
-              <a:rPr lang="en-US" sz="1600" dirty="0" err="1"/>
-              <a:t>get_from_date</a:t>
-            </a:r>
-            <a:r>
-              <a:rPr lang="en-US" sz="1600" dirty="0"/>
-              <a:t> – ✅</a:t>
-            </a:r>
-          </a:p>
-          <a:p>
-            <a:pPr algn="l"/>
-            <a:r>
-              <a:rPr lang="en-US" sz="1600" dirty="0" err="1"/>
-              <a:t>set_to_date</a:t>
-            </a:r>
-            <a:r>
-              <a:rPr lang="en-US" sz="1600" dirty="0"/>
-              <a:t> – ✅</a:t>
-            </a:r>
-          </a:p>
-          <a:p>
-            <a:pPr algn="l"/>
-            <a:r>
-              <a:rPr lang="en-US" sz="1600" dirty="0" err="1"/>
-              <a:t>get_to_date</a:t>
-            </a:r>
-            <a:r>
-              <a:rPr lang="en-US" sz="1600" dirty="0"/>
-              <a:t> – ✅</a:t>
-            </a:r>
-          </a:p>
-          <a:p>
-            <a:pPr algn="l"/>
-            <a:r>
-              <a:rPr lang="en-US" sz="1600" dirty="0" err="1"/>
-              <a:t>set_message</a:t>
-            </a:r>
-            <a:r>
-              <a:rPr lang="en-US" sz="1600" dirty="0"/>
-              <a:t> – ✅</a:t>
-            </a:r>
-          </a:p>
-          <a:p>
-            <a:pPr algn="l"/>
-            <a:r>
-              <a:rPr lang="en-US" sz="1600" dirty="0" err="1"/>
-              <a:t>message_check_exact_match_only</a:t>
-            </a:r>
-            <a:r>
-              <a:rPr lang="en-US" sz="1600" dirty="0"/>
-              <a:t> - ✅</a:t>
-            </a:r>
-          </a:p>
-          <a:p>
-            <a:pPr algn="l"/>
-            <a:r>
-              <a:rPr lang="en-US" sz="1600" dirty="0" err="1"/>
-              <a:t>message_uncheck_exact_match_only</a:t>
-            </a:r>
-            <a:r>
-              <a:rPr lang="en-US" sz="1600" dirty="0"/>
-              <a:t> – ✅</a:t>
-            </a:r>
-          </a:p>
-          <a:p>
-            <a:pPr algn="l"/>
-            <a:r>
-              <a:rPr lang="en-US" sz="1600" dirty="0" err="1"/>
-              <a:t>check_Ack</a:t>
-            </a:r>
-            <a:r>
-              <a:rPr lang="en-US" sz="1600" dirty="0"/>
-              <a:t> - ✅</a:t>
-            </a:r>
-          </a:p>
-          <a:p>
-            <a:pPr algn="l"/>
-            <a:r>
-              <a:rPr lang="en-US" sz="1600" dirty="0" err="1"/>
-              <a:t>clear_alert</a:t>
-            </a:r>
-            <a:r>
-              <a:rPr lang="en-US" sz="1600" dirty="0"/>
-              <a:t> - ✅</a:t>
-            </a:r>
-          </a:p>
-          <a:p>
-            <a:pPr algn="l"/>
-            <a:r>
-              <a:rPr lang="en-US" sz="1600" dirty="0" err="1"/>
-              <a:t>hide_event</a:t>
-            </a:r>
-            <a:r>
-              <a:rPr lang="en-US" sz="1600" dirty="0"/>
-              <a:t> - ✅</a:t>
-            </a:r>
-          </a:p>
-          <a:p>
-            <a:pPr algn="l"/>
-            <a:r>
-              <a:rPr lang="en-US" sz="1600" dirty="0" err="1"/>
-              <a:t>show_hidden_events</a:t>
-            </a:r>
-            <a:r>
-              <a:rPr lang="en-US" sz="1600" dirty="0"/>
-              <a:t> - ✅</a:t>
-            </a:r>
-          </a:p>
-          <a:p>
-            <a:pPr algn="l"/>
-            <a:r>
-              <a:rPr lang="en-US" sz="1600" dirty="0" err="1"/>
-              <a:t>get_all_events</a:t>
-            </a:r>
-            <a:r>
-              <a:rPr lang="en-US" sz="1600" dirty="0"/>
-              <a:t> - ✅</a:t>
-            </a:r>
-          </a:p>
-          <a:p>
-            <a:pPr algn="l"/>
-            <a:r>
-              <a:rPr lang="en-US" sz="1600" dirty="0" err="1"/>
-              <a:t>get_all_alarms</a:t>
-            </a:r>
-            <a:r>
-              <a:rPr lang="en-US" sz="1600" dirty="0"/>
-              <a:t> – ✅</a:t>
-            </a:r>
-          </a:p>
-          <a:p>
-            <a:pPr algn="l"/>
-            <a:endParaRPr lang="en-US" sz="1600" dirty="0"/>
-          </a:p>
-          <a:p>
-            <a:pPr algn="l"/>
-            <a:endParaRPr lang="en-US" sz="1600" dirty="0"/>
-          </a:p>
-          <a:p>
-            <a:pPr algn="l"/>
-            <a:endParaRPr lang="en-US" sz="1600" dirty="0"/>
-          </a:p>
-          <a:p>
-            <a:pPr algn="l"/>
-            <a:endParaRPr lang="en-US" sz="1600" dirty="0"/>
-          </a:p>
-          <a:p>
-            <a:pPr algn="l"/>
-            <a:endParaRPr lang="en-US" sz="1600" dirty="0"/>
-          </a:p>
-        </p:txBody>
-      </p:sp>
-      <p:sp>
-        <p:nvSpPr>
-          <p:cNvPr id="4" name="TextBox 3">
-            <a:extLst>
-              <a:ext uri="{FF2B5EF4-FFF2-40B4-BE49-F238E27FC236}">
-                <a16:creationId xmlns:a16="http://schemas.microsoft.com/office/drawing/2014/main" id="{5612F797-AC80-C4F0-DF53-D945A8E92D24}"/>
-              </a:ext>
-            </a:extLst>
-          </p:cNvPr>
-          <p:cNvSpPr txBox="1"/>
-          <p:nvPr/>
-        </p:nvSpPr>
-        <p:spPr>
-          <a:xfrm>
-            <a:off x="9858568" y="199942"/>
-            <a:ext cx="1982724" cy="369332"/>
-          </a:xfrm>
-          <a:prstGeom prst="rect">
-            <a:avLst/>
-          </a:prstGeom>
-          <a:noFill/>
-        </p:spPr>
-        <p:txBody>
-          <a:bodyPr wrap="square" rtlCol="0">
-            <a:spAutoFit/>
-          </a:bodyPr>
-          <a:lstStyle/>
-          <a:p>
-            <a:r>
-              <a:rPr lang="en-US" b="1" dirty="0">
-                <a:highlight>
-                  <a:srgbClr val="00FF00"/>
-                </a:highlight>
-              </a:rPr>
-              <a:t>Summary: 100%</a:t>
-            </a:r>
-            <a:endParaRPr lang="en-US" sz="1200" b="1" dirty="0">
-              <a:highlight>
-                <a:srgbClr val="00FF00"/>
-              </a:highlight>
-            </a:endParaRPr>
-          </a:p>
-        </p:txBody>
-      </p:sp>
-    </p:spTree>
-    <p:extLst>
-      <p:ext uri="{BB962C8B-B14F-4D97-AF65-F5344CB8AC3E}">
-        <p14:creationId xmlns:p14="http://schemas.microsoft.com/office/powerpoint/2010/main" val="893295985"/>
-      </p:ext>
-    </p:extLst>
-  </p:cSld>
-  <p:clrMapOvr>
-    <a:masterClrMapping/>
-  </p:clrMapOvr>
-</p:sld>
-</file>
-
-<file path=ppt/slides/slide28.xml><?xml version="1.0" encoding="utf-8"?>
-<p:sld xmlns:a="http://schemas.openxmlformats.org/drawingml/2006/main" xmlns:r="http://schemas.openxmlformats.org/officeDocument/2006/relationships" xmlns:p="http://schemas.openxmlformats.org/presentationml/2006/main">
-  <p:cSld>
-    <p:spTree>
-      <p:nvGrpSpPr>
-        <p:cNvPr id="1" name="">
-          <a:extLst>
-            <a:ext uri="{FF2B5EF4-FFF2-40B4-BE49-F238E27FC236}">
-              <a16:creationId xmlns:a16="http://schemas.microsoft.com/office/drawing/2014/main" id="{54478EF2-C6B9-71AD-D6A3-57607E3A8552}"/>
-            </a:ext>
-          </a:extLst>
-        </p:cNvPr>
-        <p:cNvGrpSpPr/>
-        <p:nvPr/>
-      </p:nvGrpSpPr>
-      <p:grpSpPr>
-        <a:xfrm>
-          <a:off x="0" y="0"/>
-          <a:ext cx="0" cy="0"/>
-          <a:chOff x="0" y="0"/>
-          <a:chExt cx="0" cy="0"/>
-        </a:xfrm>
-      </p:grpSpPr>
-      <p:sp>
-        <p:nvSpPr>
-          <p:cNvPr id="5" name="Subtitle 4">
-            <a:extLst>
-              <a:ext uri="{FF2B5EF4-FFF2-40B4-BE49-F238E27FC236}">
-                <a16:creationId xmlns:a16="http://schemas.microsoft.com/office/drawing/2014/main" id="{FD4B3B28-6DF9-616B-1EA8-1567C246E9C3}"/>
-              </a:ext>
-            </a:extLst>
-          </p:cNvPr>
-          <p:cNvSpPr>
-            <a:spLocks noGrp="1"/>
-          </p:cNvSpPr>
-          <p:nvPr>
-            <p:ph type="subTitle" idx="1"/>
-          </p:nvPr>
-        </p:nvSpPr>
-        <p:spPr>
-          <a:xfrm>
-            <a:off x="73152" y="91440"/>
-            <a:ext cx="12042648" cy="6693408"/>
-          </a:xfrm>
-          <a:solidFill>
-            <a:schemeClr val="accent4">
-              <a:lumMod val="40000"/>
-              <a:lumOff val="60000"/>
-            </a:schemeClr>
-          </a:solidFill>
-        </p:spPr>
-        <p:txBody>
-          <a:bodyPr/>
-          <a:lstStyle/>
-          <a:p>
-            <a:endParaRPr lang="en-US" dirty="0"/>
-          </a:p>
-          <a:p>
-            <a:endParaRPr lang="en-US" dirty="0"/>
-          </a:p>
-          <a:p>
-            <a:endParaRPr lang="en-US" dirty="0"/>
-          </a:p>
-          <a:p>
-            <a:endParaRPr lang="en-US" dirty="0"/>
-          </a:p>
-          <a:p>
-            <a:endParaRPr lang="en-US" dirty="0"/>
-          </a:p>
-          <a:p>
-            <a:endParaRPr lang="en-US" dirty="0"/>
-          </a:p>
-          <a:p>
-            <a:r>
-              <a:rPr lang="en-US" sz="4000" b="1" dirty="0" err="1"/>
-              <a:t>SystemOperations</a:t>
-            </a:r>
-            <a:endParaRPr lang="en-US" sz="4000" b="1" dirty="0"/>
-          </a:p>
-        </p:txBody>
-      </p:sp>
-    </p:spTree>
-    <p:extLst>
-      <p:ext uri="{BB962C8B-B14F-4D97-AF65-F5344CB8AC3E}">
-        <p14:creationId xmlns:p14="http://schemas.microsoft.com/office/powerpoint/2010/main" val="1122448426"/>
-      </p:ext>
-    </p:extLst>
-  </p:cSld>
-  <p:clrMapOvr>
-    <a:masterClrMapping/>
-  </p:clrMapOvr>
-</p:sld>
-</file>
-
-<file path=ppt/slides/slide29.xml><?xml version="1.0" encoding="utf-8"?>
-<p:sld xmlns:a="http://schemas.openxmlformats.org/drawingml/2006/main" xmlns:r="http://schemas.openxmlformats.org/officeDocument/2006/relationships" xmlns:p="http://schemas.openxmlformats.org/presentationml/2006/main">
-  <p:cSld>
-    <p:spTree>
-      <p:nvGrpSpPr>
-        <p:cNvPr id="1" name="">
-          <a:extLst>
-            <a:ext uri="{FF2B5EF4-FFF2-40B4-BE49-F238E27FC236}">
-              <a16:creationId xmlns:a16="http://schemas.microsoft.com/office/drawing/2014/main" id="{4F31E767-96A3-17A3-BBF3-1D1B72E96435}"/>
-            </a:ext>
-          </a:extLst>
-        </p:cNvPr>
-        <p:cNvGrpSpPr/>
-        <p:nvPr/>
-      </p:nvGrpSpPr>
-      <p:grpSpPr>
-        <a:xfrm>
-          <a:off x="0" y="0"/>
-          <a:ext cx="0" cy="0"/>
-          <a:chOff x="0" y="0"/>
-          <a:chExt cx="0" cy="0"/>
-        </a:xfrm>
-      </p:grpSpPr>
-      <p:sp>
-        <p:nvSpPr>
-          <p:cNvPr id="3" name="Subtitle 2">
-            <a:extLst>
-              <a:ext uri="{FF2B5EF4-FFF2-40B4-BE49-F238E27FC236}">
-                <a16:creationId xmlns:a16="http://schemas.microsoft.com/office/drawing/2014/main" id="{0C3365AC-8F5C-A01C-A340-F5DC9724C79D}"/>
-              </a:ext>
-            </a:extLst>
-          </p:cNvPr>
-          <p:cNvSpPr>
-            <a:spLocks noGrp="1"/>
-          </p:cNvSpPr>
-          <p:nvPr>
-            <p:ph type="subTitle" idx="1"/>
-          </p:nvPr>
-        </p:nvSpPr>
-        <p:spPr>
-          <a:xfrm>
-            <a:off x="106680" y="99886"/>
-            <a:ext cx="11990832" cy="6666674"/>
-          </a:xfrm>
-        </p:spPr>
-        <p:txBody>
-          <a:bodyPr>
-            <a:normAutofit/>
-          </a:bodyPr>
-          <a:lstStyle/>
-          <a:p>
-            <a:pPr algn="l"/>
-            <a:r>
-              <a:rPr lang="en-US" sz="1800" b="1" dirty="0" err="1"/>
-              <a:t>System_operations</a:t>
-            </a:r>
-            <a:r>
-              <a:rPr lang="en-US" sz="1800" b="1" dirty="0"/>
-              <a:t>: (6 functions)</a:t>
-            </a:r>
-          </a:p>
-          <a:p>
-            <a:pPr algn="l"/>
-            <a:r>
-              <a:rPr lang="en-US" sz="1600" dirty="0" err="1"/>
-              <a:t>click_polling_restart</a:t>
-            </a:r>
-            <a:r>
-              <a:rPr lang="en-US" sz="1600" dirty="0"/>
-              <a:t> – ✅</a:t>
-            </a:r>
-          </a:p>
-          <a:p>
-            <a:pPr algn="l"/>
-            <a:r>
-              <a:rPr lang="en-US" sz="1600" dirty="0" err="1"/>
-              <a:t>click_deleting_OTN_inconsistent_services</a:t>
-            </a:r>
-            <a:r>
-              <a:rPr lang="en-US" sz="1600" dirty="0"/>
-              <a:t> – ✅</a:t>
-            </a:r>
-          </a:p>
-          <a:p>
-            <a:pPr algn="l"/>
-            <a:r>
-              <a:rPr lang="en-US" sz="1600" dirty="0" err="1"/>
-              <a:t>click_synchronizing_OTN_services</a:t>
-            </a:r>
-            <a:r>
-              <a:rPr lang="en-US" sz="1600" dirty="0"/>
-              <a:t> – ✅</a:t>
-            </a:r>
-          </a:p>
-          <a:p>
-            <a:pPr algn="l"/>
-            <a:r>
-              <a:rPr lang="en-US" sz="1600" dirty="0" err="1"/>
-              <a:t>click_deleting_ROADM_inconsistent_services</a:t>
-            </a:r>
-            <a:r>
-              <a:rPr lang="en-US" sz="1600" dirty="0"/>
-              <a:t> – ✅</a:t>
-            </a:r>
-          </a:p>
-          <a:p>
-            <a:pPr algn="l"/>
-            <a:r>
-              <a:rPr lang="en-US" sz="1600" dirty="0" err="1"/>
-              <a:t>click_synchronizing_ROADM_services</a:t>
-            </a:r>
-            <a:r>
-              <a:rPr lang="en-US" sz="1600" dirty="0"/>
-              <a:t> – ✅</a:t>
-            </a:r>
-          </a:p>
-          <a:p>
-            <a:pPr algn="l"/>
-            <a:r>
-              <a:rPr lang="en-US" sz="1600" dirty="0" err="1"/>
-              <a:t>click_exit</a:t>
-            </a:r>
-            <a:r>
-              <a:rPr lang="en-US" sz="1600" dirty="0"/>
-              <a:t> - ✅</a:t>
-            </a:r>
-          </a:p>
-          <a:p>
-            <a:pPr algn="l"/>
-            <a:endParaRPr lang="en-US" sz="1100" dirty="0"/>
-          </a:p>
-          <a:p>
-            <a:pPr algn="l"/>
-            <a:endParaRPr lang="en-US" sz="1600" dirty="0"/>
-          </a:p>
-          <a:p>
-            <a:pPr algn="l"/>
-            <a:endParaRPr lang="en-US" sz="1600" dirty="0"/>
-          </a:p>
-          <a:p>
-            <a:pPr algn="l"/>
-            <a:endParaRPr lang="en-US" sz="1600" dirty="0"/>
-          </a:p>
-        </p:txBody>
-      </p:sp>
-      <p:sp>
-        <p:nvSpPr>
-          <p:cNvPr id="2" name="TextBox 1">
-            <a:extLst>
-              <a:ext uri="{FF2B5EF4-FFF2-40B4-BE49-F238E27FC236}">
-                <a16:creationId xmlns:a16="http://schemas.microsoft.com/office/drawing/2014/main" id="{EDEDE7F8-7FCC-694F-4F6C-53ACBB2CC093}"/>
-              </a:ext>
-            </a:extLst>
-          </p:cNvPr>
-          <p:cNvSpPr txBox="1"/>
-          <p:nvPr/>
-        </p:nvSpPr>
-        <p:spPr>
-          <a:xfrm>
-            <a:off x="9858568" y="199942"/>
-            <a:ext cx="1982724" cy="369332"/>
-          </a:xfrm>
-          <a:prstGeom prst="rect">
-            <a:avLst/>
-          </a:prstGeom>
-          <a:noFill/>
-        </p:spPr>
-        <p:txBody>
-          <a:bodyPr wrap="square" rtlCol="0">
-            <a:spAutoFit/>
-          </a:bodyPr>
-          <a:lstStyle/>
-          <a:p>
-            <a:r>
-              <a:rPr lang="en-US" b="1" dirty="0">
-                <a:highlight>
-                  <a:srgbClr val="00FF00"/>
-                </a:highlight>
-              </a:rPr>
-              <a:t>Summary: 100%</a:t>
-            </a:r>
-            <a:endParaRPr lang="en-US" sz="1200" b="1" dirty="0">
-              <a:highlight>
-                <a:srgbClr val="00FF00"/>
-              </a:highlight>
-            </a:endParaRPr>
-          </a:p>
-        </p:txBody>
-      </p:sp>
-    </p:spTree>
-    <p:extLst>
-      <p:ext uri="{BB962C8B-B14F-4D97-AF65-F5344CB8AC3E}">
-        <p14:creationId xmlns:p14="http://schemas.microsoft.com/office/powerpoint/2010/main" val="1153328505"/>
       </p:ext>
     </p:extLst>
   </p:cSld>
@@ -7961,6 +8238,952 @@
         <p:cNvPr id="1" name="">
           <a:extLst>
             <a:ext uri="{FF2B5EF4-FFF2-40B4-BE49-F238E27FC236}">
+              <a16:creationId xmlns:a16="http://schemas.microsoft.com/office/drawing/2014/main" id="{5F4DC67A-AF95-0186-BD33-47412C30A9C2}"/>
+            </a:ext>
+          </a:extLst>
+        </p:cNvPr>
+        <p:cNvGrpSpPr/>
+        <p:nvPr/>
+      </p:nvGrpSpPr>
+      <p:grpSpPr>
+        <a:xfrm>
+          <a:off x="0" y="0"/>
+          <a:ext cx="0" cy="0"/>
+          <a:chOff x="0" y="0"/>
+          <a:chExt cx="0" cy="0"/>
+        </a:xfrm>
+      </p:grpSpPr>
+      <p:sp>
+        <p:nvSpPr>
+          <p:cNvPr id="3" name="Subtitle 2">
+            <a:extLst>
+              <a:ext uri="{FF2B5EF4-FFF2-40B4-BE49-F238E27FC236}">
+                <a16:creationId xmlns:a16="http://schemas.microsoft.com/office/drawing/2014/main" id="{E4F94C5B-296F-4A40-A2ED-2F54D51EF13D}"/>
+              </a:ext>
+            </a:extLst>
+          </p:cNvPr>
+          <p:cNvSpPr>
+            <a:spLocks noGrp="1"/>
+          </p:cNvSpPr>
+          <p:nvPr>
+            <p:ph type="subTitle" idx="1"/>
+          </p:nvPr>
+        </p:nvSpPr>
+        <p:spPr>
+          <a:xfrm>
+            <a:off x="106680" y="99886"/>
+            <a:ext cx="11990832" cy="6666674"/>
+          </a:xfrm>
+        </p:spPr>
+        <p:txBody>
+          <a:bodyPr>
+            <a:normAutofit lnSpcReduction="10000"/>
+          </a:bodyPr>
+          <a:lstStyle/>
+          <a:p>
+            <a:pPr algn="l"/>
+            <a:r>
+              <a:rPr lang="en-US" sz="1800" b="1" dirty="0" err="1"/>
+              <a:t>Alarms_and_events</a:t>
+            </a:r>
+            <a:r>
+              <a:rPr lang="en-US" sz="1800" b="1" dirty="0"/>
+              <a:t>: (37 functions)</a:t>
+            </a:r>
+          </a:p>
+          <a:p>
+            <a:pPr algn="l"/>
+            <a:r>
+              <a:rPr lang="en-US" sz="1600" dirty="0" err="1"/>
+              <a:t>set_faults_type</a:t>
+            </a:r>
+            <a:r>
+              <a:rPr lang="en-US" sz="1600" dirty="0"/>
+              <a:t> – ✅</a:t>
+            </a:r>
+          </a:p>
+          <a:p>
+            <a:pPr algn="l"/>
+            <a:r>
+              <a:rPr lang="en-US" sz="1600" dirty="0" err="1"/>
+              <a:t>get_faults_type</a:t>
+            </a:r>
+            <a:r>
+              <a:rPr lang="en-US" sz="1600" dirty="0"/>
+              <a:t> – ✅</a:t>
+            </a:r>
+          </a:p>
+          <a:p>
+            <a:pPr algn="l"/>
+            <a:r>
+              <a:rPr lang="en-US" sz="1600" dirty="0" err="1"/>
+              <a:t>set_severity</a:t>
+            </a:r>
+            <a:r>
+              <a:rPr lang="en-US" sz="1600" dirty="0"/>
+              <a:t> – ✅</a:t>
+            </a:r>
+          </a:p>
+          <a:p>
+            <a:pPr algn="l"/>
+            <a:r>
+              <a:rPr lang="en-US" sz="1600" dirty="0" err="1"/>
+              <a:t>get_severity</a:t>
+            </a:r>
+            <a:r>
+              <a:rPr lang="en-US" sz="1600" dirty="0"/>
+              <a:t> – ✅</a:t>
+            </a:r>
+          </a:p>
+          <a:p>
+            <a:pPr algn="l"/>
+            <a:r>
+              <a:rPr lang="en-US" sz="1600" dirty="0" err="1"/>
+              <a:t>set_all_severities</a:t>
+            </a:r>
+            <a:r>
+              <a:rPr lang="en-US" sz="1600" dirty="0"/>
+              <a:t> - ✅</a:t>
+            </a:r>
+          </a:p>
+          <a:p>
+            <a:pPr algn="l"/>
+            <a:r>
+              <a:rPr lang="en-US" sz="1600" dirty="0" err="1"/>
+              <a:t>set_category</a:t>
+            </a:r>
+            <a:r>
+              <a:rPr lang="en-US" sz="1600" dirty="0"/>
+              <a:t> – ✅</a:t>
+            </a:r>
+          </a:p>
+          <a:p>
+            <a:pPr algn="l"/>
+            <a:r>
+              <a:rPr lang="en-US" sz="1600" dirty="0" err="1"/>
+              <a:t>get_category</a:t>
+            </a:r>
+            <a:r>
+              <a:rPr lang="en-US" sz="1600" dirty="0"/>
+              <a:t> – ✅</a:t>
+            </a:r>
+          </a:p>
+          <a:p>
+            <a:pPr algn="l"/>
+            <a:r>
+              <a:rPr lang="en-US" sz="1600" dirty="0" err="1"/>
+              <a:t>set_all_categories</a:t>
+            </a:r>
+            <a:r>
+              <a:rPr lang="en-US" sz="1600" dirty="0"/>
+              <a:t> - ✅</a:t>
+            </a:r>
+          </a:p>
+          <a:p>
+            <a:pPr algn="l"/>
+            <a:r>
+              <a:rPr lang="en-US" sz="1600" dirty="0" err="1"/>
+              <a:t>set_filterBy</a:t>
+            </a:r>
+            <a:r>
+              <a:rPr lang="en-US" sz="1600" dirty="0"/>
+              <a:t> – ✅</a:t>
+            </a:r>
+          </a:p>
+          <a:p>
+            <a:pPr algn="l"/>
+            <a:r>
+              <a:rPr lang="en-US" sz="1600" dirty="0" err="1"/>
+              <a:t>get_filterBy</a:t>
+            </a:r>
+            <a:r>
+              <a:rPr lang="en-US" sz="1600" dirty="0"/>
+              <a:t> – ✅</a:t>
+            </a:r>
+          </a:p>
+          <a:p>
+            <a:pPr algn="l"/>
+            <a:r>
+              <a:rPr lang="en-US" sz="1600" dirty="0" err="1"/>
+              <a:t>set_all_devices_filterBy_devices</a:t>
+            </a:r>
+            <a:r>
+              <a:rPr lang="en-US" sz="1600" dirty="0"/>
+              <a:t>(when Filter by is on Devices) – ✅</a:t>
+            </a:r>
+          </a:p>
+          <a:p>
+            <a:pPr algn="l"/>
+            <a:r>
+              <a:rPr lang="en-US" sz="1600" dirty="0" err="1"/>
+              <a:t>get_all_selected_devices_filterBy_devices</a:t>
+            </a:r>
+            <a:r>
+              <a:rPr lang="en-US" sz="1600" dirty="0"/>
+              <a:t>(when Filter by is on Devices) – ✅</a:t>
+            </a:r>
+          </a:p>
+          <a:p>
+            <a:pPr algn="l"/>
+            <a:r>
+              <a:rPr lang="en-US" sz="1600" dirty="0" err="1"/>
+              <a:t>select_device_filterBy_devices</a:t>
+            </a:r>
+            <a:r>
+              <a:rPr lang="en-US" sz="1600" dirty="0"/>
+              <a:t>(when Filter by is on Devices) – ✅</a:t>
+            </a:r>
+          </a:p>
+          <a:p>
+            <a:pPr algn="l"/>
+            <a:r>
+              <a:rPr lang="en-US" sz="1600" dirty="0" err="1"/>
+              <a:t>close_devices_dropdown</a:t>
+            </a:r>
+            <a:r>
+              <a:rPr lang="en-US" sz="1600" dirty="0"/>
+              <a:t> - ✅</a:t>
+            </a:r>
+          </a:p>
+          <a:p>
+            <a:pPr algn="l"/>
+            <a:r>
+              <a:rPr lang="en-US" sz="1600" dirty="0" err="1"/>
+              <a:t>remove_device_filterBy_devices</a:t>
+            </a:r>
+            <a:r>
+              <a:rPr lang="en-US" sz="1600" dirty="0"/>
+              <a:t>(when Filter by is on Devices) – ✅</a:t>
+            </a:r>
+          </a:p>
+          <a:p>
+            <a:pPr algn="l"/>
+            <a:r>
+              <a:rPr lang="en-US" sz="1600" dirty="0" err="1"/>
+              <a:t>remove_all_devices_filterBy_devices</a:t>
+            </a:r>
+            <a:r>
+              <a:rPr lang="en-US" sz="1600" dirty="0"/>
+              <a:t>(when Filter by is on Devices) - ✅</a:t>
+            </a:r>
+          </a:p>
+          <a:p>
+            <a:pPr algn="l"/>
+            <a:r>
+              <a:rPr lang="en-US" sz="1600" dirty="0" err="1"/>
+              <a:t>select_domain_or_chassis_filterBy_domain_or_chassis</a:t>
+            </a:r>
+            <a:r>
+              <a:rPr lang="en-US" sz="1600" dirty="0"/>
+              <a:t>(when Filter by is on Domain/chassis) – ✅</a:t>
+            </a:r>
+          </a:p>
+          <a:p>
+            <a:pPr algn="l"/>
+            <a:r>
+              <a:rPr lang="en-US" sz="1600" dirty="0" err="1"/>
+              <a:t>get_selected_domain_or_chassis_filterBy_domain_or_chassis</a:t>
+            </a:r>
+            <a:r>
+              <a:rPr lang="en-US" sz="1600" dirty="0"/>
+              <a:t>(when Filter by is on Domain/chassis) – ✅</a:t>
+            </a:r>
+          </a:p>
+          <a:p>
+            <a:pPr algn="l"/>
+            <a:r>
+              <a:rPr lang="en-US" sz="1600" dirty="0" err="1"/>
+              <a:t>select_all_domains_filterBy_domain_or_chassis</a:t>
+            </a:r>
+            <a:r>
+              <a:rPr lang="en-US" sz="1600" dirty="0"/>
+              <a:t>(when Filter by is on Domain/chassis) - ✅</a:t>
+            </a:r>
+          </a:p>
+          <a:p>
+            <a:pPr algn="l"/>
+            <a:endParaRPr lang="en-US" sz="1600" dirty="0"/>
+          </a:p>
+          <a:p>
+            <a:pPr algn="l"/>
+            <a:endParaRPr lang="en-US" sz="1600" dirty="0"/>
+          </a:p>
+          <a:p>
+            <a:pPr algn="l"/>
+            <a:endParaRPr lang="en-US" sz="1600" dirty="0"/>
+          </a:p>
+          <a:p>
+            <a:pPr algn="l"/>
+            <a:endParaRPr lang="en-US" sz="1600" dirty="0"/>
+          </a:p>
+        </p:txBody>
+      </p:sp>
+    </p:spTree>
+    <p:extLst>
+      <p:ext uri="{BB962C8B-B14F-4D97-AF65-F5344CB8AC3E}">
+        <p14:creationId xmlns:p14="http://schemas.microsoft.com/office/powerpoint/2010/main" val="406930974"/>
+      </p:ext>
+    </p:extLst>
+  </p:cSld>
+  <p:clrMapOvr>
+    <a:masterClrMapping/>
+  </p:clrMapOvr>
+</p:sld>
+</file>
+
+<file path=ppt/slides/slide31.xml><?xml version="1.0" encoding="utf-8"?>
+<p:sld xmlns:a="http://schemas.openxmlformats.org/drawingml/2006/main" xmlns:r="http://schemas.openxmlformats.org/officeDocument/2006/relationships" xmlns:p="http://schemas.openxmlformats.org/presentationml/2006/main">
+  <p:cSld>
+    <p:spTree>
+      <p:nvGrpSpPr>
+        <p:cNvPr id="1" name="">
+          <a:extLst>
+            <a:ext uri="{FF2B5EF4-FFF2-40B4-BE49-F238E27FC236}">
+              <a16:creationId xmlns:a16="http://schemas.microsoft.com/office/drawing/2014/main" id="{DC1D1432-91F2-3424-F82D-3403B895C19E}"/>
+            </a:ext>
+          </a:extLst>
+        </p:cNvPr>
+        <p:cNvGrpSpPr/>
+        <p:nvPr/>
+      </p:nvGrpSpPr>
+      <p:grpSpPr>
+        <a:xfrm>
+          <a:off x="0" y="0"/>
+          <a:ext cx="0" cy="0"/>
+          <a:chOff x="0" y="0"/>
+          <a:chExt cx="0" cy="0"/>
+        </a:xfrm>
+      </p:grpSpPr>
+      <p:sp>
+        <p:nvSpPr>
+          <p:cNvPr id="3" name="Subtitle 2">
+            <a:extLst>
+              <a:ext uri="{FF2B5EF4-FFF2-40B4-BE49-F238E27FC236}">
+                <a16:creationId xmlns:a16="http://schemas.microsoft.com/office/drawing/2014/main" id="{8527567B-287A-D08E-0E39-C833D8C1CD93}"/>
+              </a:ext>
+            </a:extLst>
+          </p:cNvPr>
+          <p:cNvSpPr>
+            <a:spLocks noGrp="1"/>
+          </p:cNvSpPr>
+          <p:nvPr>
+            <p:ph type="subTitle" idx="1"/>
+          </p:nvPr>
+        </p:nvSpPr>
+        <p:spPr>
+          <a:xfrm>
+            <a:off x="106680" y="99886"/>
+            <a:ext cx="11990832" cy="6666674"/>
+          </a:xfrm>
+        </p:spPr>
+        <p:txBody>
+          <a:bodyPr>
+            <a:normAutofit/>
+          </a:bodyPr>
+          <a:lstStyle/>
+          <a:p>
+            <a:pPr algn="l"/>
+            <a:r>
+              <a:rPr lang="en-US" sz="1800" b="1" dirty="0" err="1"/>
+              <a:t>Alarms_and_events</a:t>
+            </a:r>
+            <a:r>
+              <a:rPr lang="en-US" sz="1800" b="1" dirty="0"/>
+              <a:t>: (37 functions)</a:t>
+            </a:r>
+          </a:p>
+          <a:p>
+            <a:pPr algn="l"/>
+            <a:r>
+              <a:rPr lang="en-US" sz="1600" dirty="0" err="1"/>
+              <a:t>select_devices_type_filterBy_device_type</a:t>
+            </a:r>
+            <a:r>
+              <a:rPr lang="en-US" sz="1600" dirty="0"/>
+              <a:t> - ✅</a:t>
+            </a:r>
+          </a:p>
+          <a:p>
+            <a:pPr algn="l"/>
+            <a:r>
+              <a:rPr lang="en-US" sz="1600" dirty="0" err="1"/>
+              <a:t>get_selected_devices_type_filterBy_device_type</a:t>
+            </a:r>
+            <a:r>
+              <a:rPr lang="en-US" sz="1600" dirty="0"/>
+              <a:t> - ✅</a:t>
+            </a:r>
+          </a:p>
+          <a:p>
+            <a:pPr algn="l"/>
+            <a:r>
+              <a:rPr lang="en-US" sz="1600" dirty="0" err="1"/>
+              <a:t>select_all_devices_type_filterBy_device_type</a:t>
+            </a:r>
+            <a:r>
+              <a:rPr lang="en-US" sz="1600" dirty="0"/>
+              <a:t> - ✅</a:t>
+            </a:r>
+          </a:p>
+          <a:p>
+            <a:pPr algn="l"/>
+            <a:r>
+              <a:rPr lang="en-US" sz="1600" dirty="0" err="1"/>
+              <a:t>set_from_date</a:t>
+            </a:r>
+            <a:r>
+              <a:rPr lang="en-US" sz="1600" dirty="0"/>
+              <a:t> – ✅</a:t>
+            </a:r>
+          </a:p>
+          <a:p>
+            <a:pPr algn="l"/>
+            <a:r>
+              <a:rPr lang="en-US" sz="1600" dirty="0" err="1"/>
+              <a:t>get_from_date</a:t>
+            </a:r>
+            <a:r>
+              <a:rPr lang="en-US" sz="1600" dirty="0"/>
+              <a:t> – ✅</a:t>
+            </a:r>
+          </a:p>
+          <a:p>
+            <a:pPr algn="l"/>
+            <a:r>
+              <a:rPr lang="en-US" sz="1600" dirty="0" err="1"/>
+              <a:t>set_to_date</a:t>
+            </a:r>
+            <a:r>
+              <a:rPr lang="en-US" sz="1600" dirty="0"/>
+              <a:t> – ✅</a:t>
+            </a:r>
+          </a:p>
+          <a:p>
+            <a:pPr algn="l"/>
+            <a:r>
+              <a:rPr lang="en-US" sz="1600" dirty="0" err="1"/>
+              <a:t>get_to_date</a:t>
+            </a:r>
+            <a:r>
+              <a:rPr lang="en-US" sz="1600" dirty="0"/>
+              <a:t> – ✅</a:t>
+            </a:r>
+          </a:p>
+          <a:p>
+            <a:pPr algn="l"/>
+            <a:r>
+              <a:rPr lang="en-US" sz="1600" dirty="0" err="1"/>
+              <a:t>set_message</a:t>
+            </a:r>
+            <a:r>
+              <a:rPr lang="en-US" sz="1600" dirty="0"/>
+              <a:t> – ✅</a:t>
+            </a:r>
+          </a:p>
+          <a:p>
+            <a:pPr algn="l"/>
+            <a:r>
+              <a:rPr lang="en-US" sz="1600" dirty="0" err="1"/>
+              <a:t>message_check_exact_match_only</a:t>
+            </a:r>
+            <a:r>
+              <a:rPr lang="en-US" sz="1600" dirty="0"/>
+              <a:t> - ✅</a:t>
+            </a:r>
+          </a:p>
+          <a:p>
+            <a:pPr algn="l"/>
+            <a:r>
+              <a:rPr lang="en-US" sz="1600" dirty="0" err="1"/>
+              <a:t>message_uncheck_exact_match_only</a:t>
+            </a:r>
+            <a:r>
+              <a:rPr lang="en-US" sz="1600" dirty="0"/>
+              <a:t> – ✅</a:t>
+            </a:r>
+          </a:p>
+          <a:p>
+            <a:pPr algn="l"/>
+            <a:r>
+              <a:rPr lang="en-US" sz="1600" dirty="0" err="1"/>
+              <a:t>check_Ack</a:t>
+            </a:r>
+            <a:r>
+              <a:rPr lang="en-US" sz="1600" dirty="0"/>
+              <a:t> - ✅</a:t>
+            </a:r>
+          </a:p>
+          <a:p>
+            <a:pPr algn="l"/>
+            <a:r>
+              <a:rPr lang="en-US" sz="1600" dirty="0" err="1"/>
+              <a:t>clear_alert</a:t>
+            </a:r>
+            <a:r>
+              <a:rPr lang="en-US" sz="1600" dirty="0"/>
+              <a:t> - ✅</a:t>
+            </a:r>
+          </a:p>
+          <a:p>
+            <a:pPr algn="l"/>
+            <a:r>
+              <a:rPr lang="en-US" sz="1600" dirty="0" err="1"/>
+              <a:t>hide_event</a:t>
+            </a:r>
+            <a:r>
+              <a:rPr lang="en-US" sz="1600" dirty="0"/>
+              <a:t> - ✅</a:t>
+            </a:r>
+          </a:p>
+          <a:p>
+            <a:pPr algn="l"/>
+            <a:r>
+              <a:rPr lang="en-US" sz="1600" dirty="0" err="1"/>
+              <a:t>show_hidden_events</a:t>
+            </a:r>
+            <a:r>
+              <a:rPr lang="en-US" sz="1600" dirty="0"/>
+              <a:t> - ✅</a:t>
+            </a:r>
+          </a:p>
+          <a:p>
+            <a:pPr algn="l"/>
+            <a:r>
+              <a:rPr lang="en-US" sz="1600" dirty="0" err="1"/>
+              <a:t>get_all_events</a:t>
+            </a:r>
+            <a:r>
+              <a:rPr lang="en-US" sz="1600" dirty="0"/>
+              <a:t> - ✅</a:t>
+            </a:r>
+          </a:p>
+          <a:p>
+            <a:pPr algn="l"/>
+            <a:r>
+              <a:rPr lang="en-US" sz="1600" dirty="0" err="1"/>
+              <a:t>get_all_alarms</a:t>
+            </a:r>
+            <a:r>
+              <a:rPr lang="en-US" sz="1600" dirty="0"/>
+              <a:t> – ✅</a:t>
+            </a:r>
+          </a:p>
+          <a:p>
+            <a:pPr algn="l"/>
+            <a:r>
+              <a:rPr lang="en-US" sz="1600" dirty="0" err="1"/>
+              <a:t>click_previous</a:t>
+            </a:r>
+            <a:r>
+              <a:rPr lang="en-US" sz="1600" dirty="0"/>
+              <a:t> - ✅</a:t>
+            </a:r>
+          </a:p>
+          <a:p>
+            <a:pPr algn="l"/>
+            <a:r>
+              <a:rPr lang="en-US" sz="1600" dirty="0" err="1"/>
+              <a:t>click_next</a:t>
+            </a:r>
+            <a:r>
+              <a:rPr lang="en-US" sz="1600" dirty="0"/>
+              <a:t> - ✅</a:t>
+            </a:r>
+          </a:p>
+          <a:p>
+            <a:pPr algn="l"/>
+            <a:endParaRPr lang="en-US" sz="1600" dirty="0"/>
+          </a:p>
+          <a:p>
+            <a:pPr algn="l"/>
+            <a:endParaRPr lang="en-US" sz="1600" dirty="0"/>
+          </a:p>
+          <a:p>
+            <a:pPr algn="l"/>
+            <a:endParaRPr lang="en-US" sz="1600" dirty="0"/>
+          </a:p>
+          <a:p>
+            <a:pPr algn="l"/>
+            <a:endParaRPr lang="en-US" sz="1600" dirty="0"/>
+          </a:p>
+        </p:txBody>
+      </p:sp>
+      <p:sp>
+        <p:nvSpPr>
+          <p:cNvPr id="4" name="TextBox 3">
+            <a:extLst>
+              <a:ext uri="{FF2B5EF4-FFF2-40B4-BE49-F238E27FC236}">
+                <a16:creationId xmlns:a16="http://schemas.microsoft.com/office/drawing/2014/main" id="{5612F797-AC80-C4F0-DF53-D945A8E92D24}"/>
+              </a:ext>
+            </a:extLst>
+          </p:cNvPr>
+          <p:cNvSpPr txBox="1"/>
+          <p:nvPr/>
+        </p:nvSpPr>
+        <p:spPr>
+          <a:xfrm>
+            <a:off x="9858568" y="199942"/>
+            <a:ext cx="1982724" cy="369332"/>
+          </a:xfrm>
+          <a:prstGeom prst="rect">
+            <a:avLst/>
+          </a:prstGeom>
+          <a:noFill/>
+        </p:spPr>
+        <p:txBody>
+          <a:bodyPr wrap="square" rtlCol="0">
+            <a:spAutoFit/>
+          </a:bodyPr>
+          <a:lstStyle/>
+          <a:p>
+            <a:r>
+              <a:rPr lang="en-US" b="1" dirty="0">
+                <a:highlight>
+                  <a:srgbClr val="00FF00"/>
+                </a:highlight>
+              </a:rPr>
+              <a:t>Summary: 100%</a:t>
+            </a:r>
+            <a:endParaRPr lang="en-US" sz="1200" b="1" dirty="0">
+              <a:highlight>
+                <a:srgbClr val="00FF00"/>
+              </a:highlight>
+            </a:endParaRPr>
+          </a:p>
+        </p:txBody>
+      </p:sp>
+    </p:spTree>
+    <p:extLst>
+      <p:ext uri="{BB962C8B-B14F-4D97-AF65-F5344CB8AC3E}">
+        <p14:creationId xmlns:p14="http://schemas.microsoft.com/office/powerpoint/2010/main" val="893295985"/>
+      </p:ext>
+    </p:extLst>
+  </p:cSld>
+  <p:clrMapOvr>
+    <a:masterClrMapping/>
+  </p:clrMapOvr>
+</p:sld>
+</file>
+
+<file path=ppt/slides/slide32.xml><?xml version="1.0" encoding="utf-8"?>
+<p:sld xmlns:a="http://schemas.openxmlformats.org/drawingml/2006/main" xmlns:r="http://schemas.openxmlformats.org/officeDocument/2006/relationships" xmlns:p="http://schemas.openxmlformats.org/presentationml/2006/main">
+  <p:cSld>
+    <p:spTree>
+      <p:nvGrpSpPr>
+        <p:cNvPr id="1" name="">
+          <a:extLst>
+            <a:ext uri="{FF2B5EF4-FFF2-40B4-BE49-F238E27FC236}">
+              <a16:creationId xmlns:a16="http://schemas.microsoft.com/office/drawing/2014/main" id="{54478EF2-C6B9-71AD-D6A3-57607E3A8552}"/>
+            </a:ext>
+          </a:extLst>
+        </p:cNvPr>
+        <p:cNvGrpSpPr/>
+        <p:nvPr/>
+      </p:nvGrpSpPr>
+      <p:grpSpPr>
+        <a:xfrm>
+          <a:off x="0" y="0"/>
+          <a:ext cx="0" cy="0"/>
+          <a:chOff x="0" y="0"/>
+          <a:chExt cx="0" cy="0"/>
+        </a:xfrm>
+      </p:grpSpPr>
+      <p:sp>
+        <p:nvSpPr>
+          <p:cNvPr id="5" name="Subtitle 4">
+            <a:extLst>
+              <a:ext uri="{FF2B5EF4-FFF2-40B4-BE49-F238E27FC236}">
+                <a16:creationId xmlns:a16="http://schemas.microsoft.com/office/drawing/2014/main" id="{FD4B3B28-6DF9-616B-1EA8-1567C246E9C3}"/>
+              </a:ext>
+            </a:extLst>
+          </p:cNvPr>
+          <p:cNvSpPr>
+            <a:spLocks noGrp="1"/>
+          </p:cNvSpPr>
+          <p:nvPr>
+            <p:ph type="subTitle" idx="1"/>
+          </p:nvPr>
+        </p:nvSpPr>
+        <p:spPr>
+          <a:xfrm>
+            <a:off x="73152" y="91440"/>
+            <a:ext cx="12042648" cy="6693408"/>
+          </a:xfrm>
+          <a:solidFill>
+            <a:schemeClr val="accent4">
+              <a:lumMod val="40000"/>
+              <a:lumOff val="60000"/>
+            </a:schemeClr>
+          </a:solidFill>
+        </p:spPr>
+        <p:txBody>
+          <a:bodyPr/>
+          <a:lstStyle/>
+          <a:p>
+            <a:endParaRPr lang="en-US" dirty="0"/>
+          </a:p>
+          <a:p>
+            <a:endParaRPr lang="en-US" dirty="0"/>
+          </a:p>
+          <a:p>
+            <a:endParaRPr lang="en-US" dirty="0"/>
+          </a:p>
+          <a:p>
+            <a:endParaRPr lang="en-US" dirty="0"/>
+          </a:p>
+          <a:p>
+            <a:endParaRPr lang="en-US" dirty="0"/>
+          </a:p>
+          <a:p>
+            <a:endParaRPr lang="en-US" dirty="0"/>
+          </a:p>
+          <a:p>
+            <a:r>
+              <a:rPr lang="en-US" sz="4000" b="1" dirty="0" err="1"/>
+              <a:t>SystemOperations</a:t>
+            </a:r>
+            <a:endParaRPr lang="en-US" sz="4000" b="1" dirty="0"/>
+          </a:p>
+        </p:txBody>
+      </p:sp>
+    </p:spTree>
+    <p:extLst>
+      <p:ext uri="{BB962C8B-B14F-4D97-AF65-F5344CB8AC3E}">
+        <p14:creationId xmlns:p14="http://schemas.microsoft.com/office/powerpoint/2010/main" val="1122448426"/>
+      </p:ext>
+    </p:extLst>
+  </p:cSld>
+  <p:clrMapOvr>
+    <a:masterClrMapping/>
+  </p:clrMapOvr>
+</p:sld>
+</file>
+
+<file path=ppt/slides/slide33.xml><?xml version="1.0" encoding="utf-8"?>
+<p:sld xmlns:a="http://schemas.openxmlformats.org/drawingml/2006/main" xmlns:r="http://schemas.openxmlformats.org/officeDocument/2006/relationships" xmlns:p="http://schemas.openxmlformats.org/presentationml/2006/main">
+  <p:cSld>
+    <p:spTree>
+      <p:nvGrpSpPr>
+        <p:cNvPr id="1" name="">
+          <a:extLst>
+            <a:ext uri="{FF2B5EF4-FFF2-40B4-BE49-F238E27FC236}">
+              <a16:creationId xmlns:a16="http://schemas.microsoft.com/office/drawing/2014/main" id="{4F31E767-96A3-17A3-BBF3-1D1B72E96435}"/>
+            </a:ext>
+          </a:extLst>
+        </p:cNvPr>
+        <p:cNvGrpSpPr/>
+        <p:nvPr/>
+      </p:nvGrpSpPr>
+      <p:grpSpPr>
+        <a:xfrm>
+          <a:off x="0" y="0"/>
+          <a:ext cx="0" cy="0"/>
+          <a:chOff x="0" y="0"/>
+          <a:chExt cx="0" cy="0"/>
+        </a:xfrm>
+      </p:grpSpPr>
+      <p:sp>
+        <p:nvSpPr>
+          <p:cNvPr id="3" name="Subtitle 2">
+            <a:extLst>
+              <a:ext uri="{FF2B5EF4-FFF2-40B4-BE49-F238E27FC236}">
+                <a16:creationId xmlns:a16="http://schemas.microsoft.com/office/drawing/2014/main" id="{0C3365AC-8F5C-A01C-A340-F5DC9724C79D}"/>
+              </a:ext>
+            </a:extLst>
+          </p:cNvPr>
+          <p:cNvSpPr>
+            <a:spLocks noGrp="1"/>
+          </p:cNvSpPr>
+          <p:nvPr>
+            <p:ph type="subTitle" idx="1"/>
+          </p:nvPr>
+        </p:nvSpPr>
+        <p:spPr>
+          <a:xfrm>
+            <a:off x="106680" y="99886"/>
+            <a:ext cx="11990832" cy="6666674"/>
+          </a:xfrm>
+        </p:spPr>
+        <p:txBody>
+          <a:bodyPr>
+            <a:normAutofit/>
+          </a:bodyPr>
+          <a:lstStyle/>
+          <a:p>
+            <a:pPr algn="l"/>
+            <a:r>
+              <a:rPr lang="en-US" sz="1800" b="1" dirty="0" err="1"/>
+              <a:t>System_operations</a:t>
+            </a:r>
+            <a:r>
+              <a:rPr lang="en-US" sz="1800" b="1" dirty="0"/>
+              <a:t>: (7 functions)</a:t>
+            </a:r>
+          </a:p>
+          <a:p>
+            <a:pPr algn="l"/>
+            <a:r>
+              <a:rPr lang="en-US" sz="1600" dirty="0" err="1"/>
+              <a:t>click_polling_restart</a:t>
+            </a:r>
+            <a:r>
+              <a:rPr lang="en-US" sz="1600" dirty="0"/>
+              <a:t> – ✅</a:t>
+            </a:r>
+          </a:p>
+          <a:p>
+            <a:pPr algn="l"/>
+            <a:r>
+              <a:rPr lang="en-US" sz="1600" dirty="0" err="1"/>
+              <a:t>click_deleting_OTN_inconsistent_services</a:t>
+            </a:r>
+            <a:r>
+              <a:rPr lang="en-US" sz="1600" dirty="0"/>
+              <a:t> – ✅</a:t>
+            </a:r>
+          </a:p>
+          <a:p>
+            <a:pPr algn="l"/>
+            <a:r>
+              <a:rPr lang="en-US" sz="1600" dirty="0" err="1"/>
+              <a:t>click_synchronizing_OTN_services</a:t>
+            </a:r>
+            <a:r>
+              <a:rPr lang="en-US" sz="1600" dirty="0"/>
+              <a:t> – ✅</a:t>
+            </a:r>
+          </a:p>
+          <a:p>
+            <a:pPr algn="l"/>
+            <a:r>
+              <a:rPr lang="en-US" sz="1600" dirty="0" err="1"/>
+              <a:t>click_deleting_ROADM_inconsistent_services</a:t>
+            </a:r>
+            <a:r>
+              <a:rPr lang="en-US" sz="1600" dirty="0"/>
+              <a:t> – ✅</a:t>
+            </a:r>
+          </a:p>
+          <a:p>
+            <a:pPr algn="l"/>
+            <a:r>
+              <a:rPr lang="en-US" sz="1600" dirty="0" err="1"/>
+              <a:t>click_synchronizing_ROADM_services</a:t>
+            </a:r>
+            <a:r>
+              <a:rPr lang="en-US" sz="1600" dirty="0"/>
+              <a:t> – ✅</a:t>
+            </a:r>
+          </a:p>
+          <a:p>
+            <a:pPr algn="l"/>
+            <a:r>
+              <a:rPr lang="en-US" sz="1600" dirty="0" err="1"/>
+              <a:t>click_exit</a:t>
+            </a:r>
+            <a:r>
+              <a:rPr lang="en-US" sz="1600" dirty="0"/>
+              <a:t> - ✅</a:t>
+            </a:r>
+          </a:p>
+          <a:p>
+            <a:pPr algn="l"/>
+            <a:r>
+              <a:rPr lang="en-US" sz="1600" dirty="0" err="1"/>
+              <a:t>is_system_operations_page_visible</a:t>
+            </a:r>
+            <a:r>
+              <a:rPr lang="en-US" sz="1600" dirty="0"/>
+              <a:t> – ✅</a:t>
+            </a:r>
+          </a:p>
+          <a:p>
+            <a:pPr algn="l"/>
+            <a:endParaRPr lang="en-US" sz="1600" dirty="0"/>
+          </a:p>
+          <a:p>
+            <a:pPr algn="l"/>
+            <a:endParaRPr lang="en-US" sz="1100" dirty="0"/>
+          </a:p>
+          <a:p>
+            <a:pPr algn="l"/>
+            <a:endParaRPr lang="en-US" sz="1600" dirty="0"/>
+          </a:p>
+          <a:p>
+            <a:pPr algn="l"/>
+            <a:endParaRPr lang="en-US" sz="1600" dirty="0"/>
+          </a:p>
+          <a:p>
+            <a:pPr algn="l"/>
+            <a:endParaRPr lang="en-US" sz="1600" dirty="0"/>
+          </a:p>
+        </p:txBody>
+      </p:sp>
+      <p:sp>
+        <p:nvSpPr>
+          <p:cNvPr id="2" name="TextBox 1">
+            <a:extLst>
+              <a:ext uri="{FF2B5EF4-FFF2-40B4-BE49-F238E27FC236}">
+                <a16:creationId xmlns:a16="http://schemas.microsoft.com/office/drawing/2014/main" id="{EDEDE7F8-7FCC-694F-4F6C-53ACBB2CC093}"/>
+              </a:ext>
+            </a:extLst>
+          </p:cNvPr>
+          <p:cNvSpPr txBox="1"/>
+          <p:nvPr/>
+        </p:nvSpPr>
+        <p:spPr>
+          <a:xfrm>
+            <a:off x="9858568" y="199942"/>
+            <a:ext cx="1982724" cy="369332"/>
+          </a:xfrm>
+          <a:prstGeom prst="rect">
+            <a:avLst/>
+          </a:prstGeom>
+          <a:noFill/>
+        </p:spPr>
+        <p:txBody>
+          <a:bodyPr wrap="square" rtlCol="0">
+            <a:spAutoFit/>
+          </a:bodyPr>
+          <a:lstStyle/>
+          <a:p>
+            <a:r>
+              <a:rPr lang="en-US" b="1" dirty="0">
+                <a:highlight>
+                  <a:srgbClr val="00FF00"/>
+                </a:highlight>
+              </a:rPr>
+              <a:t>Summary: 100%</a:t>
+            </a:r>
+            <a:endParaRPr lang="en-US" sz="1200" b="1" dirty="0">
+              <a:highlight>
+                <a:srgbClr val="00FF00"/>
+              </a:highlight>
+            </a:endParaRPr>
+          </a:p>
+        </p:txBody>
+      </p:sp>
+    </p:spTree>
+    <p:extLst>
+      <p:ext uri="{BB962C8B-B14F-4D97-AF65-F5344CB8AC3E}">
+        <p14:creationId xmlns:p14="http://schemas.microsoft.com/office/powerpoint/2010/main" val="1153328505"/>
+      </p:ext>
+    </p:extLst>
+  </p:cSld>
+  <p:clrMapOvr>
+    <a:masterClrMapping/>
+  </p:clrMapOvr>
+</p:sld>
+</file>
+
+<file path=ppt/slides/slide34.xml><?xml version="1.0" encoding="utf-8"?>
+<p:sld xmlns:a="http://schemas.openxmlformats.org/drawingml/2006/main" xmlns:r="http://schemas.openxmlformats.org/officeDocument/2006/relationships" xmlns:p="http://schemas.openxmlformats.org/presentationml/2006/main">
+  <p:cSld>
+    <p:spTree>
+      <p:nvGrpSpPr>
+        <p:cNvPr id="1" name="">
+          <a:extLst>
+            <a:ext uri="{FF2B5EF4-FFF2-40B4-BE49-F238E27FC236}">
               <a16:creationId xmlns:a16="http://schemas.microsoft.com/office/drawing/2014/main" id="{3D3B0079-7319-3CFA-B0EA-1A211C0E1854}"/>
             </a:ext>
           </a:extLst>
@@ -8047,7 +9270,7 @@
 </p:sld>
 </file>
 
-<file path=ppt/slides/slide31.xml><?xml version="1.0" encoding="utf-8"?>
+<file path=ppt/slides/slide35.xml><?xml version="1.0" encoding="utf-8"?>
 <p:sld xmlns:a="http://schemas.openxmlformats.org/drawingml/2006/main" xmlns:r="http://schemas.openxmlformats.org/officeDocument/2006/relationships" xmlns:p="http://schemas.openxmlformats.org/presentationml/2006/main">
   <p:cSld>
     <p:spTree>
@@ -8105,7 +9328,7 @@
             </a:r>
             <a:r>
               <a:rPr lang="en-US" sz="1800" b="1" dirty="0"/>
-              <a:t>: (24 functions)</a:t>
+              <a:t>: (20 functions)</a:t>
             </a:r>
           </a:p>
           <a:p>
@@ -8272,6 +9495,43 @@
               <a:rPr lang="en-US" sz="1600" dirty="0"/>
               <a:t> - ✅</a:t>
             </a:r>
+          </a:p>
+          <a:p>
+            <a:pPr algn="l"/>
+            <a:r>
+              <a:rPr lang="en-US" sz="1600" dirty="0" err="1"/>
+              <a:t>close_global_search</a:t>
+            </a:r>
+            <a:r>
+              <a:rPr lang="en-US" sz="1600" dirty="0"/>
+              <a:t> – ✅</a:t>
+            </a:r>
+          </a:p>
+          <a:p>
+            <a:pPr algn="l"/>
+            <a:r>
+              <a:rPr lang="en-US" sz="1600" dirty="0" err="1"/>
+              <a:t>select_sub_domain</a:t>
+            </a:r>
+            <a:r>
+              <a:rPr lang="en-US" sz="1600" dirty="0"/>
+              <a:t> – ✅</a:t>
+            </a:r>
+          </a:p>
+          <a:p>
+            <a:pPr algn="l"/>
+            <a:r>
+              <a:rPr lang="en-US" sz="1600" dirty="0" err="1"/>
+              <a:t>click_back_to_sub_domain_map</a:t>
+            </a:r>
+            <a:r>
+              <a:rPr lang="en-US" sz="1600" dirty="0"/>
+              <a:t> - ✅</a:t>
+            </a:r>
+          </a:p>
+          <a:p>
+            <a:pPr algn="l"/>
+            <a:endParaRPr lang="en-US" sz="1600" dirty="0"/>
           </a:p>
           <a:p>
             <a:pPr algn="l"/>
@@ -8312,7 +9572,7 @@
 </p:sld>
 </file>
 
-<file path=ppt/slides/slide32.xml><?xml version="1.0" encoding="utf-8"?>
+<file path=ppt/slides/slide36.xml><?xml version="1.0" encoding="utf-8"?>
 <p:sld xmlns:a="http://schemas.openxmlformats.org/drawingml/2006/main" xmlns:r="http://schemas.openxmlformats.org/officeDocument/2006/relationships" xmlns:p="http://schemas.openxmlformats.org/presentationml/2006/main">
   <p:cSld>
     <p:spTree>
@@ -8374,42 +9634,9 @@
             </a:r>
             <a:r>
               <a:rPr lang="en-US" sz="1600" b="1" dirty="0"/>
-              <a:t>(24 functions)</a:t>
+              <a:t>(20 functions)</a:t>
             </a:r>
             <a:endParaRPr lang="en-US" sz="1600" dirty="0"/>
-          </a:p>
-          <a:p>
-            <a:pPr algn="l"/>
-            <a:r>
-              <a:rPr lang="en-US" sz="1600" dirty="0" err="1"/>
-              <a:t>close_global_search</a:t>
-            </a:r>
-            <a:r>
-              <a:rPr lang="en-US" sz="1600" dirty="0"/>
-              <a:t> – ✅</a:t>
-            </a:r>
-          </a:p>
-          <a:p>
-            <a:pPr algn="l"/>
-            <a:r>
-              <a:rPr lang="en-US" sz="1600" dirty="0" err="1"/>
-              <a:t>select_sub_domain</a:t>
-            </a:r>
-            <a:r>
-              <a:rPr lang="en-US" sz="1600" dirty="0"/>
-              <a:t> – ✅</a:t>
-            </a:r>
-          </a:p>
-          <a:p>
-            <a:pPr algn="l"/>
-            <a:r>
-              <a:rPr lang="en-US" sz="1600" dirty="0" err="1"/>
-              <a:t>click_back_to_sub_domain_map</a:t>
-            </a:r>
-            <a:r>
-              <a:rPr lang="en-US" sz="1600" dirty="0"/>
-              <a:t> - ✅</a:t>
-            </a:r>
           </a:p>
           <a:p>
             <a:pPr algn="l"/>
@@ -8493,7 +9720,7 @@
                   <a:srgbClr val="FFFF00"/>
                 </a:highlight>
               </a:rPr>
-              <a:t>Summary: 70%</a:t>
+              <a:t>Summary: 85%</a:t>
             </a:r>
             <a:endParaRPr lang="en-US" sz="1200" b="1" dirty="0">
               <a:highlight>
@@ -8516,7 +9743,7 @@
 </p:sld>
 </file>
 
-<file path=ppt/slides/slide33.xml><?xml version="1.0" encoding="utf-8"?>
+<file path=ppt/slides/slide37.xml><?xml version="1.0" encoding="utf-8"?>
 <p:sld xmlns:a="http://schemas.openxmlformats.org/drawingml/2006/main" xmlns:r="http://schemas.openxmlformats.org/officeDocument/2006/relationships" xmlns:p="http://schemas.openxmlformats.org/presentationml/2006/main">
   <p:cSld>
     <p:spTree>
